--- a/tests/formats/output/studio-live-service-rpg-economy/brief.pptx
+++ b/tests/formats/output/studio-live-service-rpg-economy/brief.pptx
@@ -2,18 +2,18 @@
 <file path=ppt/presentation.xml><?xml version="1.0" encoding="utf-8"?>
 <p:presentation xmlns:p="http://schemas.openxmlformats.org/presentationml/2006/main">
   <p:sldMasterIdLst>
-    <p:sldMasterId xmlns:r="http://schemas.openxmlformats.org/officeDocument/2006/relationships" id="2147483648" r:id="R98d758148efc4650"/>
+    <p:sldMasterId xmlns:r="http://schemas.openxmlformats.org/officeDocument/2006/relationships" id="2147483648" r:id="Re911184940df4f75"/>
   </p:sldMasterIdLst>
   <p:notesMasterIdLst>
-    <p:notesMasterId xmlns:r="http://schemas.openxmlformats.org/officeDocument/2006/relationships" r:id="Rd876bad76dba431c"/>
+    <p:notesMasterId xmlns:r="http://schemas.openxmlformats.org/officeDocument/2006/relationships" r:id="R9adf3e352b914bbd"/>
   </p:notesMasterIdLst>
   <p:sldIdLst>
-    <p:sldId xmlns:r="http://schemas.openxmlformats.org/officeDocument/2006/relationships" id="256" r:id="R9374dd746e8b4409"/>
-    <p:sldId xmlns:r="http://schemas.openxmlformats.org/officeDocument/2006/relationships" id="257" r:id="Rf02addc777364dd8"/>
-    <p:sldId xmlns:r="http://schemas.openxmlformats.org/officeDocument/2006/relationships" id="258" r:id="R45c3407f42054a41"/>
-    <p:sldId xmlns:r="http://schemas.openxmlformats.org/officeDocument/2006/relationships" id="259" r:id="R6c4c495616df41ba"/>
-    <p:sldId xmlns:r="http://schemas.openxmlformats.org/officeDocument/2006/relationships" id="260" r:id="R7a1a7ce36851428d"/>
-    <p:sldId xmlns:r="http://schemas.openxmlformats.org/officeDocument/2006/relationships" id="261" r:id="R9fd98d401e46438b"/>
+    <p:sldId xmlns:r="http://schemas.openxmlformats.org/officeDocument/2006/relationships" id="256" r:id="R6eccee5277224c74"/>
+    <p:sldId xmlns:r="http://schemas.openxmlformats.org/officeDocument/2006/relationships" id="257" r:id="R05c8319047d04be3"/>
+    <p:sldId xmlns:r="http://schemas.openxmlformats.org/officeDocument/2006/relationships" id="258" r:id="R51dd3953374847b3"/>
+    <p:sldId xmlns:r="http://schemas.openxmlformats.org/officeDocument/2006/relationships" id="259" r:id="Rcd7d94c633b248f1"/>
+    <p:sldId xmlns:r="http://schemas.openxmlformats.org/officeDocument/2006/relationships" id="260" r:id="R728cc98152274b0b"/>
+    <p:sldId xmlns:r="http://schemas.openxmlformats.org/officeDocument/2006/relationships" id="261" r:id="R513aa79662184019"/>
   </p:sldIdLst>
   <p:sldSz cx="12192000" cy="6858000"/>
   <p:notesSz cx="6858000" cy="9144000"/>
@@ -900,7 +900,7 @@
   </p:cSld>
   <p:clrMap bg1="lt1" tx1="dk1" bg2="lt2" tx2="dk2" accent1="accent1" accent2="accent2" accent3="accent3" accent4="accent4" accent5="accent5" accent6="accent6" hlink="hlink" folHlink="folHlink"/>
   <p:sldLayoutIdLst>
-    <p:sldLayoutId xmlns:r="http://schemas.openxmlformats.org/officeDocument/2006/relationships" id="2147483649" r:id="Rb84df32813174228"/>
+    <p:sldLayoutId xmlns:r="http://schemas.openxmlformats.org/officeDocument/2006/relationships" id="2147483649" r:id="R80f5c7dd7df54cac"/>
   </p:sldLayoutIdLst>
   <p:txStyles>
     <p:titleStyle>
@@ -1451,7 +1451,7 @@
           <p:cNvPr id="7" name="cover-kicker">
             <a:extLst xmlns:a="http://schemas.openxmlformats.org/drawingml/2006/main">
               <a:ext uri="{FF2B5EF4-FFF2-40B4-BE49-F238E27FC236}">
-                <a16:creationId xmlns:a16="http://schemas.microsoft.com/office/drawing/2014/main" id="{1C32806D-F422-4E9B-807F-3E8CD8BA92DA}"/>
+                <a16:creationId xmlns:a16="http://schemas.microsoft.com/office/drawing/2014/main" id="{C62E5DD8-02CE-4762-B4AE-BF984E1A8A06}"/>
               </a:ext>
             </a:extLst>
           </p:cNvPr>
@@ -1509,7 +1509,7 @@
           <p:cNvPr id="2" name="cover-title">
             <a:extLst xmlns:a="http://schemas.openxmlformats.org/drawingml/2006/main">
               <a:ext uri="{FF2B5EF4-FFF2-40B4-BE49-F238E27FC236}">
-                <a16:creationId xmlns:a16="http://schemas.microsoft.com/office/drawing/2014/main" id="{16E0E1A2-F197-4B82-928E-C02FFFF166DD}"/>
+                <a16:creationId xmlns:a16="http://schemas.microsoft.com/office/drawing/2014/main" id="{606D9E89-E354-4C52-8577-7BB558A48176}"/>
               </a:ext>
             </a:extLst>
           </p:cNvPr>
@@ -1590,7 +1590,7 @@
           <p:cNvPr id="3" name="cover-subtitle">
             <a:extLst xmlns:a="http://schemas.openxmlformats.org/drawingml/2006/main">
               <a:ext uri="{FF2B5EF4-FFF2-40B4-BE49-F238E27FC236}">
-                <a16:creationId xmlns:a16="http://schemas.microsoft.com/office/drawing/2014/main" id="{A3251DC8-C6CD-4EC8-BE84-C2D2C0DB84CC}"/>
+                <a16:creationId xmlns:a16="http://schemas.microsoft.com/office/drawing/2014/main" id="{418C84F2-6358-4A66-9709-CD99EB0806BE}"/>
               </a:ext>
             </a:extLst>
           </p:cNvPr>
@@ -1648,7 +1648,7 @@
           <p:cNvPr id="4" name="cover-panel">
             <a:extLst xmlns:a="http://schemas.openxmlformats.org/drawingml/2006/main">
               <a:ext uri="{FF2B5EF4-FFF2-40B4-BE49-F238E27FC236}">
-                <a16:creationId xmlns:a16="http://schemas.microsoft.com/office/drawing/2014/main" id="{BC24E987-0FB6-478C-91F9-5160EA7CEF15}"/>
+                <a16:creationId xmlns:a16="http://schemas.microsoft.com/office/drawing/2014/main" id="{4F292B9C-868D-4252-9C42-DA801EDC0937}"/>
               </a:ext>
             </a:extLst>
           </p:cNvPr>
@@ -1662,10 +1662,8 @@
             <a:off x="8286750" y="514350"/>
             <a:ext cx="3143250" cy="5334000"/>
           </a:xfrm>
-          <a:prstGeom xmlns:a="http://schemas.openxmlformats.org/drawingml/2006/main" prst="roundRect">
-            <a:avLst>
-              <a:gd name="adj" fmla="val 2424"/>
-            </a:avLst>
+          <a:prstGeom xmlns:a="http://schemas.openxmlformats.org/drawingml/2006/main" prst="rect">
+            <a:avLst/>
           </a:prstGeom>
           <a:solidFill xmlns:a="http://schemas.openxmlformats.org/drawingml/2006/main">
             <a:srgbClr val="D0EDFA"/>
@@ -1683,7 +1681,7 @@
           <p:cNvPr id="5" name="cover-mark">
             <a:extLst xmlns:a="http://schemas.openxmlformats.org/drawingml/2006/main">
               <a:ext uri="{FF2B5EF4-FFF2-40B4-BE49-F238E27FC236}">
-                <a16:creationId xmlns:a16="http://schemas.microsoft.com/office/drawing/2014/main" id="{530AB30F-4092-48CF-BB6D-2617E654D039}"/>
+                <a16:creationId xmlns:a16="http://schemas.microsoft.com/office/drawing/2014/main" id="{2F0F8D2B-F1A7-4795-B879-C885F93BAC15}"/>
               </a:ext>
             </a:extLst>
           </p:cNvPr>
@@ -1741,7 +1739,7 @@
           <p:cNvPr id="6" name="cover-caption">
             <a:extLst xmlns:a="http://schemas.openxmlformats.org/drawingml/2006/main">
               <a:ext uri="{FF2B5EF4-FFF2-40B4-BE49-F238E27FC236}">
-                <a16:creationId xmlns:a16="http://schemas.microsoft.com/office/drawing/2014/main" id="{95A823CB-7476-4C2D-8AF5-BD4C246E8984}"/>
+                <a16:creationId xmlns:a16="http://schemas.microsoft.com/office/drawing/2014/main" id="{F9E7F053-76E5-4197-9339-3B00E58D2949}"/>
               </a:ext>
             </a:extLst>
           </p:cNvPr>
@@ -1797,7 +1795,7 @@
     </p:spTree>
     <p:extLst>
       <p:ext uri="{BB962C8B-B14F-4D97-AF65-F5344CB8AC3E}">
-        <p14:creationId xmlns:p14="http://schemas.microsoft.com/office/powerpoint/2010/main" val="2088902832"/>
+        <p14:creationId xmlns:p14="http://schemas.microsoft.com/office/powerpoint/2010/main" val="350545071"/>
       </p:ext>
     </p:extLst>
   </p:cSld>
@@ -1828,7 +1826,7 @@
           <p:cNvPr id="7" name="title-2">
             <a:extLst xmlns:a="http://schemas.openxmlformats.org/drawingml/2006/main">
               <a:ext uri="{FF2B5EF4-FFF2-40B4-BE49-F238E27FC236}">
-                <a16:creationId xmlns:a16="http://schemas.microsoft.com/office/drawing/2014/main" id="{3739BC6D-ABD7-417E-B096-C4F160DBFE6A}"/>
+                <a16:creationId xmlns:a16="http://schemas.microsoft.com/office/drawing/2014/main" id="{13D64439-158B-4B84-9470-E6AAAB65CD1C}"/>
               </a:ext>
             </a:extLst>
           </p:cNvPr>
@@ -1886,7 +1884,7 @@
           <p:cNvPr id="2" name="number-2">
             <a:extLst xmlns:a="http://schemas.openxmlformats.org/drawingml/2006/main">
               <a:ext uri="{FF2B5EF4-FFF2-40B4-BE49-F238E27FC236}">
-                <a16:creationId xmlns:a16="http://schemas.microsoft.com/office/drawing/2014/main" id="{14995A50-DF1E-4DCF-A87B-C131D06AAB1D}"/>
+                <a16:creationId xmlns:a16="http://schemas.microsoft.com/office/drawing/2014/main" id="{69772386-785E-461D-8326-3777EDFF2C38}"/>
               </a:ext>
             </a:extLst>
           </p:cNvPr>
@@ -1944,7 +1942,7 @@
           <p:cNvPr id="3" name="half-body">
             <a:extLst xmlns:a="http://schemas.openxmlformats.org/drawingml/2006/main">
               <a:ext uri="{FF2B5EF4-FFF2-40B4-BE49-F238E27FC236}">
-                <a16:creationId xmlns:a16="http://schemas.microsoft.com/office/drawing/2014/main" id="{CD8CAAC1-795F-446E-82F4-371E0C62F03B}"/>
+                <a16:creationId xmlns:a16="http://schemas.microsoft.com/office/drawing/2014/main" id="{6FA25EC7-8B6C-42D1-AD6E-0D83C20F01BD}"/>
               </a:ext>
             </a:extLst>
           </p:cNvPr>
@@ -2002,7 +2000,7 @@
           <p:cNvPr id="4" name="half-visual">
             <a:extLst xmlns:a="http://schemas.openxmlformats.org/drawingml/2006/main">
               <a:ext uri="{FF2B5EF4-FFF2-40B4-BE49-F238E27FC236}">
-                <a16:creationId xmlns:a16="http://schemas.microsoft.com/office/drawing/2014/main" id="{B415B0C3-2740-4A98-9CD6-A153FDCCE5FE}"/>
+                <a16:creationId xmlns:a16="http://schemas.microsoft.com/office/drawing/2014/main" id="{73CDDA70-FE9D-4270-94E6-E0B8C73FA09F}"/>
               </a:ext>
             </a:extLst>
           </p:cNvPr>
@@ -2016,10 +2014,8 @@
             <a:off x="6286500" y="1381125"/>
             <a:ext cx="5505450" cy="4572000"/>
           </a:xfrm>
-          <a:prstGeom xmlns:a="http://schemas.openxmlformats.org/drawingml/2006/main" prst="roundRect">
-            <a:avLst>
-              <a:gd name="adj" fmla="val 1667"/>
-            </a:avLst>
+          <a:prstGeom xmlns:a="http://schemas.openxmlformats.org/drawingml/2006/main" prst="rect">
+            <a:avLst/>
           </a:prstGeom>
           <a:solidFill xmlns:a="http://schemas.openxmlformats.org/drawingml/2006/main">
             <a:srgbClr val="EAF5FB"/>
@@ -2037,7 +2033,7 @@
           <p:cNvPr id="5" name="half-signal">
             <a:extLst xmlns:a="http://schemas.openxmlformats.org/drawingml/2006/main">
               <a:ext uri="{FF2B5EF4-FFF2-40B4-BE49-F238E27FC236}">
-                <a16:creationId xmlns:a16="http://schemas.microsoft.com/office/drawing/2014/main" id="{B3E4F0A1-3709-4960-8D6D-1DC78A59130D}"/>
+                <a16:creationId xmlns:a16="http://schemas.microsoft.com/office/drawing/2014/main" id="{0DE4E1B2-7099-4A1D-BCE0-57B3FBBCFFE2}"/>
               </a:ext>
             </a:extLst>
           </p:cNvPr>
@@ -2095,7 +2091,7 @@
           <p:cNvPr id="6" name="half-caption">
             <a:extLst xmlns:a="http://schemas.openxmlformats.org/drawingml/2006/main">
               <a:ext uri="{FF2B5EF4-FFF2-40B4-BE49-F238E27FC236}">
-                <a16:creationId xmlns:a16="http://schemas.microsoft.com/office/drawing/2014/main" id="{BC1BED58-5AFD-47FD-92C2-11F0E03834EC}"/>
+                <a16:creationId xmlns:a16="http://schemas.microsoft.com/office/drawing/2014/main" id="{2F07A475-6EAA-47EB-8C4C-49188F707949}"/>
               </a:ext>
             </a:extLst>
           </p:cNvPr>
@@ -2151,7 +2147,7 @@
     </p:spTree>
     <p:extLst>
       <p:ext uri="{BB962C8B-B14F-4D97-AF65-F5344CB8AC3E}">
-        <p14:creationId xmlns:p14="http://schemas.microsoft.com/office/powerpoint/2010/main" val="1897162939"/>
+        <p14:creationId xmlns:p14="http://schemas.microsoft.com/office/powerpoint/2010/main" val="676118048"/>
       </p:ext>
     </p:extLst>
   </p:cSld>
@@ -2182,7 +2178,7 @@
           <p:cNvPr id="9" name="title-3">
             <a:extLst xmlns:a="http://schemas.openxmlformats.org/drawingml/2006/main">
               <a:ext uri="{FF2B5EF4-FFF2-40B4-BE49-F238E27FC236}">
-                <a16:creationId xmlns:a16="http://schemas.microsoft.com/office/drawing/2014/main" id="{F4FCACC8-B0B8-408B-9E60-2F93BF637351}"/>
+                <a16:creationId xmlns:a16="http://schemas.microsoft.com/office/drawing/2014/main" id="{A64D7BCF-1C87-475F-8A1C-E8EE6747EB59}"/>
               </a:ext>
             </a:extLst>
           </p:cNvPr>
@@ -2240,7 +2236,7 @@
           <p:cNvPr id="2" name="number-3">
             <a:extLst xmlns:a="http://schemas.openxmlformats.org/drawingml/2006/main">
               <a:ext uri="{FF2B5EF4-FFF2-40B4-BE49-F238E27FC236}">
-                <a16:creationId xmlns:a16="http://schemas.microsoft.com/office/drawing/2014/main" id="{99F27ED5-40A6-46CF-B01E-18023EF13D49}"/>
+                <a16:creationId xmlns:a16="http://schemas.microsoft.com/office/drawing/2014/main" id="{DC0AB048-DCE2-4C46-82F8-0EDA9F660B72}"/>
               </a:ext>
             </a:extLst>
           </p:cNvPr>
@@ -2298,7 +2294,7 @@
           <p:cNvPr id="3" name="connector-1">
             <a:extLst xmlns:a="http://schemas.openxmlformats.org/drawingml/2006/main">
               <a:ext uri="{FF2B5EF4-FFF2-40B4-BE49-F238E27FC236}">
-                <a16:creationId xmlns:a16="http://schemas.microsoft.com/office/drawing/2014/main" id="{4C77723C-B0BE-43E0-8B76-233DD4353595}"/>
+                <a16:creationId xmlns:a16="http://schemas.microsoft.com/office/drawing/2014/main" id="{2CBD0768-FAD8-43FE-80BA-207E37AF009B}"/>
               </a:ext>
             </a:extLst>
           </p:cNvPr>
@@ -2329,7 +2325,7 @@
           <p:cNvPr id="4" name="connector-2">
             <a:extLst xmlns:a="http://schemas.openxmlformats.org/drawingml/2006/main">
               <a:ext uri="{FF2B5EF4-FFF2-40B4-BE49-F238E27FC236}">
-                <a16:creationId xmlns:a16="http://schemas.microsoft.com/office/drawing/2014/main" id="{D296506D-C947-4630-B27A-34D01396038F}"/>
+                <a16:creationId xmlns:a16="http://schemas.microsoft.com/office/drawing/2014/main" id="{606BB9B3-9999-4F02-A015-38F56213FB1B}"/>
               </a:ext>
             </a:extLst>
           </p:cNvPr>
@@ -2360,7 +2356,7 @@
           <p:cNvPr id="5" name="node-1">
             <a:extLst xmlns:a="http://schemas.openxmlformats.org/drawingml/2006/main">
               <a:ext uri="{FF2B5EF4-FFF2-40B4-BE49-F238E27FC236}">
-                <a16:creationId xmlns:a16="http://schemas.microsoft.com/office/drawing/2014/main" id="{98521C48-658A-4256-81BF-FE19929D730A}"/>
+                <a16:creationId xmlns:a16="http://schemas.microsoft.com/office/drawing/2014/main" id="{DD622B7D-B313-484B-B923-C8F3D1CC5BEA}"/>
               </a:ext>
             </a:extLst>
           </p:cNvPr>
@@ -2374,10 +2370,8 @@
             <a:off x="666750" y="2381250"/>
             <a:ext cx="2476500" cy="1619250"/>
           </a:xfrm>
-          <a:prstGeom xmlns:a="http://schemas.openxmlformats.org/drawingml/2006/main" prst="roundRect">
-            <a:avLst>
-              <a:gd name="adj" fmla="val 4706"/>
-            </a:avLst>
+          <a:prstGeom xmlns:a="http://schemas.openxmlformats.org/drawingml/2006/main" prst="rect">
+            <a:avLst/>
           </a:prstGeom>
           <a:solidFill xmlns:a="http://schemas.openxmlformats.org/drawingml/2006/main">
             <a:srgbClr val="EDEDED"/>
@@ -2424,7 +2418,7 @@
           <p:cNvPr id="6" name="node-2">
             <a:extLst xmlns:a="http://schemas.openxmlformats.org/drawingml/2006/main">
               <a:ext uri="{FF2B5EF4-FFF2-40B4-BE49-F238E27FC236}">
-                <a16:creationId xmlns:a16="http://schemas.microsoft.com/office/drawing/2014/main" id="{6F0B2DAF-8449-4DB8-9B94-30A0B0DE4CFC}"/>
+                <a16:creationId xmlns:a16="http://schemas.microsoft.com/office/drawing/2014/main" id="{11BA838C-138E-45D8-A942-02CADD5647A9}"/>
               </a:ext>
             </a:extLst>
           </p:cNvPr>
@@ -2438,10 +2432,8 @@
             <a:off x="3810000" y="2381250"/>
             <a:ext cx="2476500" cy="1619250"/>
           </a:xfrm>
-          <a:prstGeom xmlns:a="http://schemas.openxmlformats.org/drawingml/2006/main" prst="roundRect">
-            <a:avLst>
-              <a:gd name="adj" fmla="val 4706"/>
-            </a:avLst>
+          <a:prstGeom xmlns:a="http://schemas.openxmlformats.org/drawingml/2006/main" prst="rect">
+            <a:avLst/>
           </a:prstGeom>
           <a:solidFill xmlns:a="http://schemas.openxmlformats.org/drawingml/2006/main">
             <a:srgbClr val="D0EDFA"/>
@@ -2488,7 +2480,7 @@
           <p:cNvPr id="7" name="node-3">
             <a:extLst xmlns:a="http://schemas.openxmlformats.org/drawingml/2006/main">
               <a:ext uri="{FF2B5EF4-FFF2-40B4-BE49-F238E27FC236}">
-                <a16:creationId xmlns:a16="http://schemas.microsoft.com/office/drawing/2014/main" id="{985C884E-4DE8-4E8B-9C88-58A1AF9326DD}"/>
+                <a16:creationId xmlns:a16="http://schemas.microsoft.com/office/drawing/2014/main" id="{89524808-E504-4359-8628-AF87A236A663}"/>
               </a:ext>
             </a:extLst>
           </p:cNvPr>
@@ -2502,10 +2494,8 @@
             <a:off x="6953250" y="2381250"/>
             <a:ext cx="2476500" cy="1619250"/>
           </a:xfrm>
-          <a:prstGeom xmlns:a="http://schemas.openxmlformats.org/drawingml/2006/main" prst="roundRect">
-            <a:avLst>
-              <a:gd name="adj" fmla="val 4706"/>
-            </a:avLst>
+          <a:prstGeom xmlns:a="http://schemas.openxmlformats.org/drawingml/2006/main" prst="rect">
+            <a:avLst/>
           </a:prstGeom>
           <a:solidFill xmlns:a="http://schemas.openxmlformats.org/drawingml/2006/main">
             <a:srgbClr val="EDEDED"/>
@@ -2552,7 +2542,7 @@
           <p:cNvPr id="8" name="diagram-footer">
             <a:extLst xmlns:a="http://schemas.openxmlformats.org/drawingml/2006/main">
               <a:ext uri="{FF2B5EF4-FFF2-40B4-BE49-F238E27FC236}">
-                <a16:creationId xmlns:a16="http://schemas.microsoft.com/office/drawing/2014/main" id="{A324C9EB-99F8-44F8-B985-E376EE934410}"/>
+                <a16:creationId xmlns:a16="http://schemas.microsoft.com/office/drawing/2014/main" id="{1960B848-D687-48D2-8355-882D321934AC}"/>
               </a:ext>
             </a:extLst>
           </p:cNvPr>
@@ -2608,7 +2598,7 @@
     </p:spTree>
     <p:extLst>
       <p:ext uri="{BB962C8B-B14F-4D97-AF65-F5344CB8AC3E}">
-        <p14:creationId xmlns:p14="http://schemas.microsoft.com/office/powerpoint/2010/main" val="748470849"/>
+        <p14:creationId xmlns:p14="http://schemas.microsoft.com/office/powerpoint/2010/main" val="1669760701"/>
       </p:ext>
     </p:extLst>
   </p:cSld>
@@ -2639,7 +2629,7 @@
           <p:cNvPr id="13" name="title-4">
             <a:extLst xmlns:a="http://schemas.openxmlformats.org/drawingml/2006/main">
               <a:ext uri="{FF2B5EF4-FFF2-40B4-BE49-F238E27FC236}">
-                <a16:creationId xmlns:a16="http://schemas.microsoft.com/office/drawing/2014/main" id="{466A6DAE-73DE-4BAA-AC1D-2470EF8FF16A}"/>
+                <a16:creationId xmlns:a16="http://schemas.microsoft.com/office/drawing/2014/main" id="{F7A33EA3-B77B-4D84-A092-95C8FB77625D}"/>
               </a:ext>
             </a:extLst>
           </p:cNvPr>
@@ -2697,7 +2687,7 @@
           <p:cNvPr id="2" name="number-4">
             <a:extLst xmlns:a="http://schemas.openxmlformats.org/drawingml/2006/main">
               <a:ext uri="{FF2B5EF4-FFF2-40B4-BE49-F238E27FC236}">
-                <a16:creationId xmlns:a16="http://schemas.microsoft.com/office/drawing/2014/main" id="{8DAF6EB7-94D2-495A-ACFF-9E67E5713CAF}"/>
+                <a16:creationId xmlns:a16="http://schemas.microsoft.com/office/drawing/2014/main" id="{EB05E460-0721-46A0-8A5A-D73D4B654AA8}"/>
               </a:ext>
             </a:extLst>
           </p:cNvPr>
@@ -2755,7 +2745,7 @@
           <p:cNvPr id="3" name="cell-0-0">
             <a:extLst xmlns:a="http://schemas.openxmlformats.org/drawingml/2006/main">
               <a:ext uri="{FF2B5EF4-FFF2-40B4-BE49-F238E27FC236}">
-                <a16:creationId xmlns:a16="http://schemas.microsoft.com/office/drawing/2014/main" id="{53790EAD-8693-4112-89C1-0990FB19004E}"/>
+                <a16:creationId xmlns:a16="http://schemas.microsoft.com/office/drawing/2014/main" id="{1DAB4536-FA1E-4789-8F8C-4E0E5011186E}"/>
               </a:ext>
             </a:extLst>
           </p:cNvPr>
@@ -2817,7 +2807,7 @@
           <p:cNvPr id="4" name="cell-0-1">
             <a:extLst xmlns:a="http://schemas.openxmlformats.org/drawingml/2006/main">
               <a:ext uri="{FF2B5EF4-FFF2-40B4-BE49-F238E27FC236}">
-                <a16:creationId xmlns:a16="http://schemas.microsoft.com/office/drawing/2014/main" id="{DD67C0B3-145C-42CA-B227-68858C65F584}"/>
+                <a16:creationId xmlns:a16="http://schemas.microsoft.com/office/drawing/2014/main" id="{583646F7-C062-4DF1-A5CF-E3101B7B196A}"/>
               </a:ext>
             </a:extLst>
           </p:cNvPr>
@@ -2879,7 +2869,7 @@
           <p:cNvPr id="5" name="cell-1-0">
             <a:extLst xmlns:a="http://schemas.openxmlformats.org/drawingml/2006/main">
               <a:ext uri="{FF2B5EF4-FFF2-40B4-BE49-F238E27FC236}">
-                <a16:creationId xmlns:a16="http://schemas.microsoft.com/office/drawing/2014/main" id="{1586E1ED-98A4-467C-9E96-C0DBFF809A9A}"/>
+                <a16:creationId xmlns:a16="http://schemas.microsoft.com/office/drawing/2014/main" id="{141028E4-CCB4-468C-8F16-0D2F6CD55F9C}"/>
               </a:ext>
             </a:extLst>
           </p:cNvPr>
@@ -2941,7 +2931,7 @@
           <p:cNvPr id="6" name="cell-1-1">
             <a:extLst xmlns:a="http://schemas.openxmlformats.org/drawingml/2006/main">
               <a:ext uri="{FF2B5EF4-FFF2-40B4-BE49-F238E27FC236}">
-                <a16:creationId xmlns:a16="http://schemas.microsoft.com/office/drawing/2014/main" id="{D1181565-FD24-4C8A-879B-32A8CCC15659}"/>
+                <a16:creationId xmlns:a16="http://schemas.microsoft.com/office/drawing/2014/main" id="{BE70C796-D2BB-40E3-88B1-FED3614C79D7}"/>
               </a:ext>
             </a:extLst>
           </p:cNvPr>
@@ -3003,7 +2993,7 @@
           <p:cNvPr id="7" name="cell-2-0">
             <a:extLst xmlns:a="http://schemas.openxmlformats.org/drawingml/2006/main">
               <a:ext uri="{FF2B5EF4-FFF2-40B4-BE49-F238E27FC236}">
-                <a16:creationId xmlns:a16="http://schemas.microsoft.com/office/drawing/2014/main" id="{3395405C-749C-4367-8525-32617BB766C2}"/>
+                <a16:creationId xmlns:a16="http://schemas.microsoft.com/office/drawing/2014/main" id="{438D86D9-C622-42B2-B3A9-EAC7E4300FA4}"/>
               </a:ext>
             </a:extLst>
           </p:cNvPr>
@@ -3065,7 +3055,7 @@
           <p:cNvPr id="8" name="cell-2-1">
             <a:extLst xmlns:a="http://schemas.openxmlformats.org/drawingml/2006/main">
               <a:ext uri="{FF2B5EF4-FFF2-40B4-BE49-F238E27FC236}">
-                <a16:creationId xmlns:a16="http://schemas.microsoft.com/office/drawing/2014/main" id="{707B90A8-AC76-4630-AD5D-06BFBA607AD5}"/>
+                <a16:creationId xmlns:a16="http://schemas.microsoft.com/office/drawing/2014/main" id="{B7D566E2-CE4D-442B-A02D-9662FFD41CEA}"/>
               </a:ext>
             </a:extLst>
           </p:cNvPr>
@@ -3127,7 +3117,7 @@
           <p:cNvPr id="9" name="cell-3-0">
             <a:extLst xmlns:a="http://schemas.openxmlformats.org/drawingml/2006/main">
               <a:ext uri="{FF2B5EF4-FFF2-40B4-BE49-F238E27FC236}">
-                <a16:creationId xmlns:a16="http://schemas.microsoft.com/office/drawing/2014/main" id="{E7AA42E6-2A36-4585-BF4D-D894B8ED1F11}"/>
+                <a16:creationId xmlns:a16="http://schemas.microsoft.com/office/drawing/2014/main" id="{91C0A238-E18F-4DD7-A274-C24993C0858C}"/>
               </a:ext>
             </a:extLst>
           </p:cNvPr>
@@ -3189,7 +3179,7 @@
           <p:cNvPr id="10" name="cell-3-1">
             <a:extLst xmlns:a="http://schemas.openxmlformats.org/drawingml/2006/main">
               <a:ext uri="{FF2B5EF4-FFF2-40B4-BE49-F238E27FC236}">
-                <a16:creationId xmlns:a16="http://schemas.microsoft.com/office/drawing/2014/main" id="{D7F10167-D0FB-4EB1-96F9-8CACAAC6CB0A}"/>
+                <a16:creationId xmlns:a16="http://schemas.microsoft.com/office/drawing/2014/main" id="{D5DD16F3-31F9-4815-A1D7-D68C4DDDF974}"/>
               </a:ext>
             </a:extLst>
           </p:cNvPr>
@@ -3251,7 +3241,7 @@
           <p:cNvPr id="11" name="cell-4-0">
             <a:extLst xmlns:a="http://schemas.openxmlformats.org/drawingml/2006/main">
               <a:ext uri="{FF2B5EF4-FFF2-40B4-BE49-F238E27FC236}">
-                <a16:creationId xmlns:a16="http://schemas.microsoft.com/office/drawing/2014/main" id="{1B69BAE7-BEE4-4B11-8BFC-AF876EC27AD3}"/>
+                <a16:creationId xmlns:a16="http://schemas.microsoft.com/office/drawing/2014/main" id="{D20F41E1-9AD5-406E-B57A-9EEF81513438}"/>
               </a:ext>
             </a:extLst>
           </p:cNvPr>
@@ -3313,7 +3303,7 @@
           <p:cNvPr id="12" name="cell-4-1">
             <a:extLst xmlns:a="http://schemas.openxmlformats.org/drawingml/2006/main">
               <a:ext uri="{FF2B5EF4-FFF2-40B4-BE49-F238E27FC236}">
-                <a16:creationId xmlns:a16="http://schemas.microsoft.com/office/drawing/2014/main" id="{20126B50-C7AB-4C64-9816-EAF1A4B8F00C}"/>
+                <a16:creationId xmlns:a16="http://schemas.microsoft.com/office/drawing/2014/main" id="{9912A3C7-4EE3-4881-83D8-0A90D55B560B}"/>
               </a:ext>
             </a:extLst>
           </p:cNvPr>
@@ -3373,7 +3363,7 @@
     </p:spTree>
     <p:extLst>
       <p:ext uri="{BB962C8B-B14F-4D97-AF65-F5344CB8AC3E}">
-        <p14:creationId xmlns:p14="http://schemas.microsoft.com/office/powerpoint/2010/main" val="1979016784"/>
+        <p14:creationId xmlns:p14="http://schemas.microsoft.com/office/powerpoint/2010/main" val="1671330383"/>
       </p:ext>
     </p:extLst>
   </p:cSld>
@@ -3404,7 +3394,7 @@
           <p:cNvPr id="12" name="title-5">
             <a:extLst xmlns:a="http://schemas.openxmlformats.org/drawingml/2006/main">
               <a:ext uri="{FF2B5EF4-FFF2-40B4-BE49-F238E27FC236}">
-                <a16:creationId xmlns:a16="http://schemas.microsoft.com/office/drawing/2014/main" id="{EC38FFD6-A7B6-41BC-9248-CC4F6069F2F4}"/>
+                <a16:creationId xmlns:a16="http://schemas.microsoft.com/office/drawing/2014/main" id="{B172C2A7-D71E-4CFA-B64D-7CBB99284E20}"/>
               </a:ext>
             </a:extLst>
           </p:cNvPr>
@@ -3462,7 +3452,7 @@
           <p:cNvPr id="2" name="number-5">
             <a:extLst xmlns:a="http://schemas.openxmlformats.org/drawingml/2006/main">
               <a:ext uri="{FF2B5EF4-FFF2-40B4-BE49-F238E27FC236}">
-                <a16:creationId xmlns:a16="http://schemas.microsoft.com/office/drawing/2014/main" id="{833372E0-085B-4CC8-AB79-A6722D31E99F}"/>
+                <a16:creationId xmlns:a16="http://schemas.microsoft.com/office/drawing/2014/main" id="{FC4DC625-78CC-4E0E-A5DD-F28E49A7F9E7}"/>
               </a:ext>
             </a:extLst>
           </p:cNvPr>
@@ -3520,7 +3510,7 @@
           <p:cNvPr id="3" name="stat-panel-0">
             <a:extLst xmlns:a="http://schemas.openxmlformats.org/drawingml/2006/main">
               <a:ext uri="{FF2B5EF4-FFF2-40B4-BE49-F238E27FC236}">
-                <a16:creationId xmlns:a16="http://schemas.microsoft.com/office/drawing/2014/main" id="{36E98EF8-9FB6-46CA-94C4-A6697B32918D}"/>
+                <a16:creationId xmlns:a16="http://schemas.microsoft.com/office/drawing/2014/main" id="{5D386AFA-3DC3-40B9-9F10-A6DD05BD07A7}"/>
               </a:ext>
             </a:extLst>
           </p:cNvPr>
@@ -3534,10 +3524,8 @@
             <a:off x="495300" y="2381250"/>
             <a:ext cx="3562350" cy="2952750"/>
           </a:xfrm>
-          <a:prstGeom xmlns:a="http://schemas.openxmlformats.org/drawingml/2006/main" prst="roundRect">
-            <a:avLst>
-              <a:gd name="adj" fmla="val 2581"/>
-            </a:avLst>
+          <a:prstGeom xmlns:a="http://schemas.openxmlformats.org/drawingml/2006/main" prst="rect">
+            <a:avLst/>
           </a:prstGeom>
           <a:solidFill xmlns:a="http://schemas.openxmlformats.org/drawingml/2006/main">
             <a:srgbClr val="EDEDED"/>
@@ -3553,7 +3541,7 @@
           <p:cNvPr id="4" name="stat-0">
             <a:extLst xmlns:a="http://schemas.openxmlformats.org/drawingml/2006/main">
               <a:ext uri="{FF2B5EF4-FFF2-40B4-BE49-F238E27FC236}">
-                <a16:creationId xmlns:a16="http://schemas.microsoft.com/office/drawing/2014/main" id="{31371464-8B3C-4E87-AFF6-4366397D03A0}"/>
+                <a16:creationId xmlns:a16="http://schemas.microsoft.com/office/drawing/2014/main" id="{3C64BF31-1397-41AE-BF28-1A1FF121F8F5}"/>
               </a:ext>
             </a:extLst>
           </p:cNvPr>
@@ -3611,7 +3599,7 @@
           <p:cNvPr id="5" name="stat-caption-0">
             <a:extLst xmlns:a="http://schemas.openxmlformats.org/drawingml/2006/main">
               <a:ext uri="{FF2B5EF4-FFF2-40B4-BE49-F238E27FC236}">
-                <a16:creationId xmlns:a16="http://schemas.microsoft.com/office/drawing/2014/main" id="{6BCF4D95-A893-4FE4-BBD6-CB989FAC1AF9}"/>
+                <a16:creationId xmlns:a16="http://schemas.microsoft.com/office/drawing/2014/main" id="{0B289F68-C5E7-4964-A7AB-E7467417DCAF}"/>
               </a:ext>
             </a:extLst>
           </p:cNvPr>
@@ -3669,7 +3657,7 @@
           <p:cNvPr id="6" name="stat-panel-1">
             <a:extLst xmlns:a="http://schemas.openxmlformats.org/drawingml/2006/main">
               <a:ext uri="{FF2B5EF4-FFF2-40B4-BE49-F238E27FC236}">
-                <a16:creationId xmlns:a16="http://schemas.microsoft.com/office/drawing/2014/main" id="{0AD34428-AF8C-46A6-9518-8EA6A906C7AF}"/>
+                <a16:creationId xmlns:a16="http://schemas.microsoft.com/office/drawing/2014/main" id="{24F062E7-C7D1-41AD-BBBB-6B7886DA6C44}"/>
               </a:ext>
             </a:extLst>
           </p:cNvPr>
@@ -3683,10 +3671,8 @@
             <a:off x="4419600" y="2381250"/>
             <a:ext cx="3562350" cy="2952750"/>
           </a:xfrm>
-          <a:prstGeom xmlns:a="http://schemas.openxmlformats.org/drawingml/2006/main" prst="roundRect">
-            <a:avLst>
-              <a:gd name="adj" fmla="val 2581"/>
-            </a:avLst>
+          <a:prstGeom xmlns:a="http://schemas.openxmlformats.org/drawingml/2006/main" prst="rect">
+            <a:avLst/>
           </a:prstGeom>
           <a:solidFill xmlns:a="http://schemas.openxmlformats.org/drawingml/2006/main">
             <a:srgbClr val="EDEDED"/>
@@ -3702,7 +3688,7 @@
           <p:cNvPr id="7" name="stat-1">
             <a:extLst xmlns:a="http://schemas.openxmlformats.org/drawingml/2006/main">
               <a:ext uri="{FF2B5EF4-FFF2-40B4-BE49-F238E27FC236}">
-                <a16:creationId xmlns:a16="http://schemas.microsoft.com/office/drawing/2014/main" id="{E54905A7-630D-4534-8BBF-D5520431E6A6}"/>
+                <a16:creationId xmlns:a16="http://schemas.microsoft.com/office/drawing/2014/main" id="{10AEBCD4-18C6-47DB-B2D4-33FFB154F128}"/>
               </a:ext>
             </a:extLst>
           </p:cNvPr>
@@ -3760,7 +3746,7 @@
           <p:cNvPr id="8" name="stat-caption-1">
             <a:extLst xmlns:a="http://schemas.openxmlformats.org/drawingml/2006/main">
               <a:ext uri="{FF2B5EF4-FFF2-40B4-BE49-F238E27FC236}">
-                <a16:creationId xmlns:a16="http://schemas.microsoft.com/office/drawing/2014/main" id="{F5F64F4D-2AD6-4ECE-8B60-A196F624A59C}"/>
+                <a16:creationId xmlns:a16="http://schemas.microsoft.com/office/drawing/2014/main" id="{D14E2FEC-8ED8-4E82-93EB-62EBA6530DF0}"/>
               </a:ext>
             </a:extLst>
           </p:cNvPr>
@@ -3818,7 +3804,7 @@
           <p:cNvPr id="9" name="stat-panel-2">
             <a:extLst xmlns:a="http://schemas.openxmlformats.org/drawingml/2006/main">
               <a:ext uri="{FF2B5EF4-FFF2-40B4-BE49-F238E27FC236}">
-                <a16:creationId xmlns:a16="http://schemas.microsoft.com/office/drawing/2014/main" id="{A40C8FDA-1419-4186-B425-B85BF64EFA3A}"/>
+                <a16:creationId xmlns:a16="http://schemas.microsoft.com/office/drawing/2014/main" id="{C76843ED-AF53-44E7-8BBA-1E01FC11D066}"/>
               </a:ext>
             </a:extLst>
           </p:cNvPr>
@@ -3832,10 +3818,8 @@
             <a:off x="8343900" y="2381250"/>
             <a:ext cx="3562350" cy="2952750"/>
           </a:xfrm>
-          <a:prstGeom xmlns:a="http://schemas.openxmlformats.org/drawingml/2006/main" prst="roundRect">
-            <a:avLst>
-              <a:gd name="adj" fmla="val 2581"/>
-            </a:avLst>
+          <a:prstGeom xmlns:a="http://schemas.openxmlformats.org/drawingml/2006/main" prst="rect">
+            <a:avLst/>
           </a:prstGeom>
           <a:solidFill xmlns:a="http://schemas.openxmlformats.org/drawingml/2006/main">
             <a:srgbClr val="EDEDED"/>
@@ -3851,7 +3835,7 @@
           <p:cNvPr id="10" name="stat-2">
             <a:extLst xmlns:a="http://schemas.openxmlformats.org/drawingml/2006/main">
               <a:ext uri="{FF2B5EF4-FFF2-40B4-BE49-F238E27FC236}">
-                <a16:creationId xmlns:a16="http://schemas.microsoft.com/office/drawing/2014/main" id="{F1C69614-51C2-4B50-9025-6389A201A708}"/>
+                <a16:creationId xmlns:a16="http://schemas.microsoft.com/office/drawing/2014/main" id="{673F88F9-DA1A-4AA8-9641-4336978E5AA9}"/>
               </a:ext>
             </a:extLst>
           </p:cNvPr>
@@ -3909,7 +3893,7 @@
           <p:cNvPr id="11" name="stat-caption-2">
             <a:extLst xmlns:a="http://schemas.openxmlformats.org/drawingml/2006/main">
               <a:ext uri="{FF2B5EF4-FFF2-40B4-BE49-F238E27FC236}">
-                <a16:creationId xmlns:a16="http://schemas.microsoft.com/office/drawing/2014/main" id="{737AE629-C071-4ED5-88A1-4838CD930087}"/>
+                <a16:creationId xmlns:a16="http://schemas.microsoft.com/office/drawing/2014/main" id="{108B4981-27FC-4672-AD37-2D05265478B3}"/>
               </a:ext>
             </a:extLst>
           </p:cNvPr>
@@ -3965,7 +3949,7 @@
     </p:spTree>
     <p:extLst>
       <p:ext uri="{BB962C8B-B14F-4D97-AF65-F5344CB8AC3E}">
-        <p14:creationId xmlns:p14="http://schemas.microsoft.com/office/powerpoint/2010/main" val="2008204380"/>
+        <p14:creationId xmlns:p14="http://schemas.microsoft.com/office/powerpoint/2010/main" val="874154087"/>
       </p:ext>
     </p:extLst>
   </p:cSld>
@@ -3996,7 +3980,7 @@
           <p:cNvPr id="9" name="title-6">
             <a:extLst xmlns:a="http://schemas.openxmlformats.org/drawingml/2006/main">
               <a:ext uri="{FF2B5EF4-FFF2-40B4-BE49-F238E27FC236}">
-                <a16:creationId xmlns:a16="http://schemas.microsoft.com/office/drawing/2014/main" id="{8DFD2801-A9ED-4E9A-997B-B88CEA644C05}"/>
+                <a16:creationId xmlns:a16="http://schemas.microsoft.com/office/drawing/2014/main" id="{078C342A-2449-4B75-A50C-23E5C7C760DD}"/>
               </a:ext>
             </a:extLst>
           </p:cNvPr>
@@ -4054,7 +4038,7 @@
           <p:cNvPr id="2" name="number-6">
             <a:extLst xmlns:a="http://schemas.openxmlformats.org/drawingml/2006/main">
               <a:ext uri="{FF2B5EF4-FFF2-40B4-BE49-F238E27FC236}">
-                <a16:creationId xmlns:a16="http://schemas.microsoft.com/office/drawing/2014/main" id="{457E6EB8-433B-4933-809D-6CC3CD1D3F41}"/>
+                <a16:creationId xmlns:a16="http://schemas.microsoft.com/office/drawing/2014/main" id="{4D819D77-E68C-4500-A762-4DB7C5D8C3B2}"/>
               </a:ext>
             </a:extLst>
           </p:cNvPr>
@@ -4112,7 +4096,7 @@
           <p:cNvPr id="3" name="step-num-0">
             <a:extLst xmlns:a="http://schemas.openxmlformats.org/drawingml/2006/main">
               <a:ext uri="{FF2B5EF4-FFF2-40B4-BE49-F238E27FC236}">
-                <a16:creationId xmlns:a16="http://schemas.microsoft.com/office/drawing/2014/main" id="{76C00F6B-04C0-490B-8B08-B02CE0F83FCF}"/>
+                <a16:creationId xmlns:a16="http://schemas.microsoft.com/office/drawing/2014/main" id="{EF8C45B9-8A9E-420F-8A3B-12293DF0EBD1}"/>
               </a:ext>
             </a:extLst>
           </p:cNvPr>
@@ -4126,10 +4110,8 @@
             <a:off x="571500" y="1619250"/>
             <a:ext cx="647700" cy="647700"/>
           </a:xfrm>
-          <a:prstGeom xmlns:a="http://schemas.openxmlformats.org/drawingml/2006/main" prst="roundRect">
-            <a:avLst>
-              <a:gd name="adj" fmla="val 11765"/>
-            </a:avLst>
+          <a:prstGeom xmlns:a="http://schemas.openxmlformats.org/drawingml/2006/main" prst="rect">
+            <a:avLst/>
           </a:prstGeom>
           <a:solidFill xmlns:a="http://schemas.openxmlformats.org/drawingml/2006/main">
             <a:srgbClr val="D0EDFA"/>
@@ -4174,7 +4156,7 @@
           <p:cNvPr id="4" name="step-0">
             <a:extLst xmlns:a="http://schemas.openxmlformats.org/drawingml/2006/main">
               <a:ext uri="{FF2B5EF4-FFF2-40B4-BE49-F238E27FC236}">
-                <a16:creationId xmlns:a16="http://schemas.microsoft.com/office/drawing/2014/main" id="{D798D393-5D9D-4C8A-988D-801D5CE0CF67}"/>
+                <a16:creationId xmlns:a16="http://schemas.microsoft.com/office/drawing/2014/main" id="{1C8E5D51-F86C-4B84-966F-2FD15EC7EBFD}"/>
               </a:ext>
             </a:extLst>
           </p:cNvPr>
@@ -4232,7 +4214,7 @@
           <p:cNvPr id="5" name="step-num-1">
             <a:extLst xmlns:a="http://schemas.openxmlformats.org/drawingml/2006/main">
               <a:ext uri="{FF2B5EF4-FFF2-40B4-BE49-F238E27FC236}">
-                <a16:creationId xmlns:a16="http://schemas.microsoft.com/office/drawing/2014/main" id="{BBA7F2E9-B7DA-406D-A2CF-DBA2136CDFA7}"/>
+                <a16:creationId xmlns:a16="http://schemas.microsoft.com/office/drawing/2014/main" id="{CBA72FB5-EB84-4907-81CB-006F5FE8C277}"/>
               </a:ext>
             </a:extLst>
           </p:cNvPr>
@@ -4246,10 +4228,8 @@
             <a:off x="571500" y="2857500"/>
             <a:ext cx="647700" cy="647700"/>
           </a:xfrm>
-          <a:prstGeom xmlns:a="http://schemas.openxmlformats.org/drawingml/2006/main" prst="roundRect">
-            <a:avLst>
-              <a:gd name="adj" fmla="val 11765"/>
-            </a:avLst>
+          <a:prstGeom xmlns:a="http://schemas.openxmlformats.org/drawingml/2006/main" prst="rect">
+            <a:avLst/>
           </a:prstGeom>
           <a:solidFill xmlns:a="http://schemas.openxmlformats.org/drawingml/2006/main">
             <a:srgbClr val="D0EDFA"/>
@@ -4294,7 +4274,7 @@
           <p:cNvPr id="6" name="step-1">
             <a:extLst xmlns:a="http://schemas.openxmlformats.org/drawingml/2006/main">
               <a:ext uri="{FF2B5EF4-FFF2-40B4-BE49-F238E27FC236}">
-                <a16:creationId xmlns:a16="http://schemas.microsoft.com/office/drawing/2014/main" id="{4CB42572-E875-4FB1-8CC8-24F5A028D45B}"/>
+                <a16:creationId xmlns:a16="http://schemas.microsoft.com/office/drawing/2014/main" id="{413B4E42-6AE6-4108-A0E8-D7127FCF1410}"/>
               </a:ext>
             </a:extLst>
           </p:cNvPr>
@@ -4352,7 +4332,7 @@
           <p:cNvPr id="7" name="step-num-2">
             <a:extLst xmlns:a="http://schemas.openxmlformats.org/drawingml/2006/main">
               <a:ext uri="{FF2B5EF4-FFF2-40B4-BE49-F238E27FC236}">
-                <a16:creationId xmlns:a16="http://schemas.microsoft.com/office/drawing/2014/main" id="{A1E8D39C-4D54-4555-B9DD-095CD4815BC3}"/>
+                <a16:creationId xmlns:a16="http://schemas.microsoft.com/office/drawing/2014/main" id="{1F8BC04D-9BC9-4F2B-BB4B-F7F9AA46A7D5}"/>
               </a:ext>
             </a:extLst>
           </p:cNvPr>
@@ -4366,10 +4346,8 @@
             <a:off x="571500" y="4095750"/>
             <a:ext cx="647700" cy="647700"/>
           </a:xfrm>
-          <a:prstGeom xmlns:a="http://schemas.openxmlformats.org/drawingml/2006/main" prst="roundRect">
-            <a:avLst>
-              <a:gd name="adj" fmla="val 11765"/>
-            </a:avLst>
+          <a:prstGeom xmlns:a="http://schemas.openxmlformats.org/drawingml/2006/main" prst="rect">
+            <a:avLst/>
           </a:prstGeom>
           <a:solidFill xmlns:a="http://schemas.openxmlformats.org/drawingml/2006/main">
             <a:srgbClr val="D0EDFA"/>
@@ -4414,7 +4392,7 @@
           <p:cNvPr id="8" name="step-2">
             <a:extLst xmlns:a="http://schemas.openxmlformats.org/drawingml/2006/main">
               <a:ext uri="{FF2B5EF4-FFF2-40B4-BE49-F238E27FC236}">
-                <a16:creationId xmlns:a16="http://schemas.microsoft.com/office/drawing/2014/main" id="{ED240F37-A454-4056-889A-5C04DB8C989F}"/>
+                <a16:creationId xmlns:a16="http://schemas.microsoft.com/office/drawing/2014/main" id="{C138D39B-65DC-4CD8-8858-1CB96693EB19}"/>
               </a:ext>
             </a:extLst>
           </p:cNvPr>
@@ -4470,7 +4448,7 @@
     </p:spTree>
     <p:extLst>
       <p:ext uri="{BB962C8B-B14F-4D97-AF65-F5344CB8AC3E}">
-        <p14:creationId xmlns:p14="http://schemas.microsoft.com/office/powerpoint/2010/main" val="1885731299"/>
+        <p14:creationId xmlns:p14="http://schemas.microsoft.com/office/powerpoint/2010/main" val="34244267"/>
       </p:ext>
     </p:extLst>
   </p:cSld>

--- a/tests/formats/output/studio-live-service-rpg-economy/brief.pptx
+++ b/tests/formats/output/studio-live-service-rpg-economy/brief.pptx
@@ -2,18 +2,18 @@
 <file path=ppt/presentation.xml><?xml version="1.0" encoding="utf-8"?>
 <p:presentation xmlns:p="http://schemas.openxmlformats.org/presentationml/2006/main">
   <p:sldMasterIdLst>
-    <p:sldMasterId xmlns:r="http://schemas.openxmlformats.org/officeDocument/2006/relationships" id="2147483648" r:id="Re911184940df4f75"/>
+    <p:sldMasterId xmlns:r="http://schemas.openxmlformats.org/officeDocument/2006/relationships" id="2147483648" r:id="R8865590c85384705"/>
   </p:sldMasterIdLst>
   <p:notesMasterIdLst>
-    <p:notesMasterId xmlns:r="http://schemas.openxmlformats.org/officeDocument/2006/relationships" r:id="R9adf3e352b914bbd"/>
+    <p:notesMasterId xmlns:r="http://schemas.openxmlformats.org/officeDocument/2006/relationships" r:id="R11a86e67ff9745b7"/>
   </p:notesMasterIdLst>
   <p:sldIdLst>
-    <p:sldId xmlns:r="http://schemas.openxmlformats.org/officeDocument/2006/relationships" id="256" r:id="R6eccee5277224c74"/>
-    <p:sldId xmlns:r="http://schemas.openxmlformats.org/officeDocument/2006/relationships" id="257" r:id="R05c8319047d04be3"/>
-    <p:sldId xmlns:r="http://schemas.openxmlformats.org/officeDocument/2006/relationships" id="258" r:id="R51dd3953374847b3"/>
-    <p:sldId xmlns:r="http://schemas.openxmlformats.org/officeDocument/2006/relationships" id="259" r:id="Rcd7d94c633b248f1"/>
-    <p:sldId xmlns:r="http://schemas.openxmlformats.org/officeDocument/2006/relationships" id="260" r:id="R728cc98152274b0b"/>
-    <p:sldId xmlns:r="http://schemas.openxmlformats.org/officeDocument/2006/relationships" id="261" r:id="R513aa79662184019"/>
+    <p:sldId xmlns:r="http://schemas.openxmlformats.org/officeDocument/2006/relationships" id="256" r:id="R72afd28de7054e8e"/>
+    <p:sldId xmlns:r="http://schemas.openxmlformats.org/officeDocument/2006/relationships" id="257" r:id="Re2780e3234be48da"/>
+    <p:sldId xmlns:r="http://schemas.openxmlformats.org/officeDocument/2006/relationships" id="258" r:id="Red8362c99591402a"/>
+    <p:sldId xmlns:r="http://schemas.openxmlformats.org/officeDocument/2006/relationships" id="259" r:id="Raf8f585b8aea43bb"/>
+    <p:sldId xmlns:r="http://schemas.openxmlformats.org/officeDocument/2006/relationships" id="260" r:id="R0f91aca69bd0442f"/>
+    <p:sldId xmlns:r="http://schemas.openxmlformats.org/officeDocument/2006/relationships" id="261" r:id="Rfb3e891c80224aed"/>
   </p:sldIdLst>
   <p:sldSz cx="12192000" cy="6858000"/>
   <p:notesSz cx="6858000" cy="9144000"/>
@@ -900,7 +900,7 @@
   </p:cSld>
   <p:clrMap bg1="lt1" tx1="dk1" bg2="lt2" tx2="dk2" accent1="accent1" accent2="accent2" accent3="accent3" accent4="accent4" accent5="accent5" accent6="accent6" hlink="hlink" folHlink="folHlink"/>
   <p:sldLayoutIdLst>
-    <p:sldLayoutId xmlns:r="http://schemas.openxmlformats.org/officeDocument/2006/relationships" id="2147483649" r:id="R80f5c7dd7df54cac"/>
+    <p:sldLayoutId xmlns:r="http://schemas.openxmlformats.org/officeDocument/2006/relationships" id="2147483649" r:id="Ra8cf2b1844ed4bfd"/>
   </p:sldLayoutIdLst>
   <p:txStyles>
     <p:titleStyle>
@@ -1451,7 +1451,7 @@
           <p:cNvPr id="7" name="cover-kicker">
             <a:extLst xmlns:a="http://schemas.openxmlformats.org/drawingml/2006/main">
               <a:ext uri="{FF2B5EF4-FFF2-40B4-BE49-F238E27FC236}">
-                <a16:creationId xmlns:a16="http://schemas.microsoft.com/office/drawing/2014/main" id="{C62E5DD8-02CE-4762-B4AE-BF984E1A8A06}"/>
+                <a16:creationId xmlns:a16="http://schemas.microsoft.com/office/drawing/2014/main" id="{E6356420-9CFD-439D-AB4A-A0EE7716E1F8}"/>
               </a:ext>
             </a:extLst>
           </p:cNvPr>
@@ -1509,7 +1509,7 @@
           <p:cNvPr id="2" name="cover-title">
             <a:extLst xmlns:a="http://schemas.openxmlformats.org/drawingml/2006/main">
               <a:ext uri="{FF2B5EF4-FFF2-40B4-BE49-F238E27FC236}">
-                <a16:creationId xmlns:a16="http://schemas.microsoft.com/office/drawing/2014/main" id="{606D9E89-E354-4C52-8577-7BB558A48176}"/>
+                <a16:creationId xmlns:a16="http://schemas.microsoft.com/office/drawing/2014/main" id="{E8D70ED5-9FEF-41C1-9B56-869726535FF1}"/>
               </a:ext>
             </a:extLst>
           </p:cNvPr>
@@ -1590,7 +1590,7 @@
           <p:cNvPr id="3" name="cover-subtitle">
             <a:extLst xmlns:a="http://schemas.openxmlformats.org/drawingml/2006/main">
               <a:ext uri="{FF2B5EF4-FFF2-40B4-BE49-F238E27FC236}">
-                <a16:creationId xmlns:a16="http://schemas.microsoft.com/office/drawing/2014/main" id="{418C84F2-6358-4A66-9709-CD99EB0806BE}"/>
+                <a16:creationId xmlns:a16="http://schemas.microsoft.com/office/drawing/2014/main" id="{4032D48D-B4B0-4267-8941-E093A40C5F19}"/>
               </a:ext>
             </a:extLst>
           </p:cNvPr>
@@ -1648,7 +1648,7 @@
           <p:cNvPr id="4" name="cover-panel">
             <a:extLst xmlns:a="http://schemas.openxmlformats.org/drawingml/2006/main">
               <a:ext uri="{FF2B5EF4-FFF2-40B4-BE49-F238E27FC236}">
-                <a16:creationId xmlns:a16="http://schemas.microsoft.com/office/drawing/2014/main" id="{4F292B9C-868D-4252-9C42-DA801EDC0937}"/>
+                <a16:creationId xmlns:a16="http://schemas.microsoft.com/office/drawing/2014/main" id="{BF604451-826E-4CF6-8B76-059C24F5BB09}"/>
               </a:ext>
             </a:extLst>
           </p:cNvPr>
@@ -1681,7 +1681,7 @@
           <p:cNvPr id="5" name="cover-mark">
             <a:extLst xmlns:a="http://schemas.openxmlformats.org/drawingml/2006/main">
               <a:ext uri="{FF2B5EF4-FFF2-40B4-BE49-F238E27FC236}">
-                <a16:creationId xmlns:a16="http://schemas.microsoft.com/office/drawing/2014/main" id="{2F0F8D2B-F1A7-4795-B879-C885F93BAC15}"/>
+                <a16:creationId xmlns:a16="http://schemas.microsoft.com/office/drawing/2014/main" id="{B81C99F9-620D-4217-BFFB-CEF7898BB5C8}"/>
               </a:ext>
             </a:extLst>
           </p:cNvPr>
@@ -1739,7 +1739,7 @@
           <p:cNvPr id="6" name="cover-caption">
             <a:extLst xmlns:a="http://schemas.openxmlformats.org/drawingml/2006/main">
               <a:ext uri="{FF2B5EF4-FFF2-40B4-BE49-F238E27FC236}">
-                <a16:creationId xmlns:a16="http://schemas.microsoft.com/office/drawing/2014/main" id="{F9E7F053-76E5-4197-9339-3B00E58D2949}"/>
+                <a16:creationId xmlns:a16="http://schemas.microsoft.com/office/drawing/2014/main" id="{EA8DAF40-C3BE-45C9-9555-395A67791FA6}"/>
               </a:ext>
             </a:extLst>
           </p:cNvPr>
@@ -1795,7 +1795,7 @@
     </p:spTree>
     <p:extLst>
       <p:ext uri="{BB962C8B-B14F-4D97-AF65-F5344CB8AC3E}">
-        <p14:creationId xmlns:p14="http://schemas.microsoft.com/office/powerpoint/2010/main" val="350545071"/>
+        <p14:creationId xmlns:p14="http://schemas.microsoft.com/office/powerpoint/2010/main" val="1578555524"/>
       </p:ext>
     </p:extLst>
   </p:cSld>
@@ -1826,7 +1826,7 @@
           <p:cNvPr id="7" name="title-2">
             <a:extLst xmlns:a="http://schemas.openxmlformats.org/drawingml/2006/main">
               <a:ext uri="{FF2B5EF4-FFF2-40B4-BE49-F238E27FC236}">
-                <a16:creationId xmlns:a16="http://schemas.microsoft.com/office/drawing/2014/main" id="{13D64439-158B-4B84-9470-E6AAAB65CD1C}"/>
+                <a16:creationId xmlns:a16="http://schemas.microsoft.com/office/drawing/2014/main" id="{F419869B-D8D1-46DB-983F-670217D4A9AB}"/>
               </a:ext>
             </a:extLst>
           </p:cNvPr>
@@ -1884,7 +1884,7 @@
           <p:cNvPr id="2" name="number-2">
             <a:extLst xmlns:a="http://schemas.openxmlformats.org/drawingml/2006/main">
               <a:ext uri="{FF2B5EF4-FFF2-40B4-BE49-F238E27FC236}">
-                <a16:creationId xmlns:a16="http://schemas.microsoft.com/office/drawing/2014/main" id="{69772386-785E-461D-8326-3777EDFF2C38}"/>
+                <a16:creationId xmlns:a16="http://schemas.microsoft.com/office/drawing/2014/main" id="{C00563B4-9331-4C32-A22A-C841D80D454E}"/>
               </a:ext>
             </a:extLst>
           </p:cNvPr>
@@ -1942,7 +1942,7 @@
           <p:cNvPr id="3" name="half-body">
             <a:extLst xmlns:a="http://schemas.openxmlformats.org/drawingml/2006/main">
               <a:ext uri="{FF2B5EF4-FFF2-40B4-BE49-F238E27FC236}">
-                <a16:creationId xmlns:a16="http://schemas.microsoft.com/office/drawing/2014/main" id="{6FA25EC7-8B6C-42D1-AD6E-0D83C20F01BD}"/>
+                <a16:creationId xmlns:a16="http://schemas.microsoft.com/office/drawing/2014/main" id="{48245E68-8C08-42AB-95D9-12B4DE05726F}"/>
               </a:ext>
             </a:extLst>
           </p:cNvPr>
@@ -1990,7 +1990,53 @@
                 <a:ea typeface="D2Coding"/>
                 <a:cs typeface="D2Coding"/>
               </a:rPr>
-              <a:t>일일 미션에서 소프트 재화를 획득하고 업그레이드에 소비한다. 운영 기준 보유량은 5,000이다.</a:t>
+              <a:t>일일 미션에서 소프트 재화를 획득하고</a:t>
+            </a:r>
+          </a:p>
+          <a:p xmlns:a="http://schemas.openxmlformats.org/drawingml/2006/main">
+            <a:pPr algn="l">
+              <a:defRPr sz="1875" b="0">
+                <a:solidFill>
+                  <a:srgbClr val="0F172A"/>
+                </a:solidFill>
+                <a:latin typeface="D2Coding"/>
+                <a:ea typeface="D2Coding"/>
+                <a:cs typeface="D2Coding"/>
+              </a:defRPr>
+            </a:pPr>
+            <a:r>
+              <a:rPr sz="1875" b="0">
+                <a:solidFill>
+                  <a:srgbClr val="0F172A"/>
+                </a:solidFill>
+                <a:latin typeface="D2Coding"/>
+                <a:ea typeface="D2Coding"/>
+                <a:cs typeface="D2Coding"/>
+              </a:rPr>
+              <a:t>업그레이드에 소비한다.</a:t>
+            </a:r>
+          </a:p>
+          <a:p xmlns:a="http://schemas.openxmlformats.org/drawingml/2006/main">
+            <a:pPr algn="l">
+              <a:defRPr sz="1875" b="0">
+                <a:solidFill>
+                  <a:srgbClr val="0F172A"/>
+                </a:solidFill>
+                <a:latin typeface="D2Coding"/>
+                <a:ea typeface="D2Coding"/>
+                <a:cs typeface="D2Coding"/>
+              </a:defRPr>
+            </a:pPr>
+            <a:r>
+              <a:rPr sz="1875" b="0">
+                <a:solidFill>
+                  <a:srgbClr val="0F172A"/>
+                </a:solidFill>
+                <a:latin typeface="D2Coding"/>
+                <a:ea typeface="D2Coding"/>
+                <a:cs typeface="D2Coding"/>
+              </a:rPr>
+              <a:t>운영 기준 보유량은 5,000이다.</a:t>
             </a:r>
           </a:p>
         </p:txBody>
@@ -2000,7 +2046,7 @@
           <p:cNvPr id="4" name="half-visual">
             <a:extLst xmlns:a="http://schemas.openxmlformats.org/drawingml/2006/main">
               <a:ext uri="{FF2B5EF4-FFF2-40B4-BE49-F238E27FC236}">
-                <a16:creationId xmlns:a16="http://schemas.microsoft.com/office/drawing/2014/main" id="{73CDDA70-FE9D-4270-94E6-E0B8C73FA09F}"/>
+                <a16:creationId xmlns:a16="http://schemas.microsoft.com/office/drawing/2014/main" id="{5CB201F8-B04A-46AE-B492-4573F322980D}"/>
               </a:ext>
             </a:extLst>
           </p:cNvPr>
@@ -2033,7 +2079,7 @@
           <p:cNvPr id="5" name="half-signal">
             <a:extLst xmlns:a="http://schemas.openxmlformats.org/drawingml/2006/main">
               <a:ext uri="{FF2B5EF4-FFF2-40B4-BE49-F238E27FC236}">
-                <a16:creationId xmlns:a16="http://schemas.microsoft.com/office/drawing/2014/main" id="{0DE4E1B2-7099-4A1D-BCE0-57B3FBBCFFE2}"/>
+                <a16:creationId xmlns:a16="http://schemas.microsoft.com/office/drawing/2014/main" id="{840C62B8-885B-45BC-BE9C-D3D8F00A8C8F}"/>
               </a:ext>
             </a:extLst>
           </p:cNvPr>
@@ -2091,7 +2137,7 @@
           <p:cNvPr id="6" name="half-caption">
             <a:extLst xmlns:a="http://schemas.openxmlformats.org/drawingml/2006/main">
               <a:ext uri="{FF2B5EF4-FFF2-40B4-BE49-F238E27FC236}">
-                <a16:creationId xmlns:a16="http://schemas.microsoft.com/office/drawing/2014/main" id="{2F07A475-6EAA-47EB-8C4C-49188F707949}"/>
+                <a16:creationId xmlns:a16="http://schemas.microsoft.com/office/drawing/2014/main" id="{D575C0F1-619C-46D9-B808-65B9D2911893}"/>
               </a:ext>
             </a:extLst>
           </p:cNvPr>
@@ -2147,7 +2193,7 @@
     </p:spTree>
     <p:extLst>
       <p:ext uri="{BB962C8B-B14F-4D97-AF65-F5344CB8AC3E}">
-        <p14:creationId xmlns:p14="http://schemas.microsoft.com/office/powerpoint/2010/main" val="676118048"/>
+        <p14:creationId xmlns:p14="http://schemas.microsoft.com/office/powerpoint/2010/main" val="517825332"/>
       </p:ext>
     </p:extLst>
   </p:cSld>
@@ -2178,7 +2224,7 @@
           <p:cNvPr id="9" name="title-3">
             <a:extLst xmlns:a="http://schemas.openxmlformats.org/drawingml/2006/main">
               <a:ext uri="{FF2B5EF4-FFF2-40B4-BE49-F238E27FC236}">
-                <a16:creationId xmlns:a16="http://schemas.microsoft.com/office/drawing/2014/main" id="{A64D7BCF-1C87-475F-8A1C-E8EE6747EB59}"/>
+                <a16:creationId xmlns:a16="http://schemas.microsoft.com/office/drawing/2014/main" id="{7A35BA27-2F5F-4A3E-AEA5-F132D5D64AE0}"/>
               </a:ext>
             </a:extLst>
           </p:cNvPr>
@@ -2236,7 +2282,7 @@
           <p:cNvPr id="2" name="number-3">
             <a:extLst xmlns:a="http://schemas.openxmlformats.org/drawingml/2006/main">
               <a:ext uri="{FF2B5EF4-FFF2-40B4-BE49-F238E27FC236}">
-                <a16:creationId xmlns:a16="http://schemas.microsoft.com/office/drawing/2014/main" id="{DC0AB048-DCE2-4C46-82F8-0EDA9F660B72}"/>
+                <a16:creationId xmlns:a16="http://schemas.microsoft.com/office/drawing/2014/main" id="{B07DAA16-F35B-4D35-8870-12C9D26A48D3}"/>
               </a:ext>
             </a:extLst>
           </p:cNvPr>
@@ -2294,7 +2340,7 @@
           <p:cNvPr id="3" name="connector-1">
             <a:extLst xmlns:a="http://schemas.openxmlformats.org/drawingml/2006/main">
               <a:ext uri="{FF2B5EF4-FFF2-40B4-BE49-F238E27FC236}">
-                <a16:creationId xmlns:a16="http://schemas.microsoft.com/office/drawing/2014/main" id="{2CBD0768-FAD8-43FE-80BA-207E37AF009B}"/>
+                <a16:creationId xmlns:a16="http://schemas.microsoft.com/office/drawing/2014/main" id="{9AEBC2BF-CC9A-464D-8DB5-C53CAAD6AA20}"/>
               </a:ext>
             </a:extLst>
           </p:cNvPr>
@@ -2325,7 +2371,7 @@
           <p:cNvPr id="4" name="connector-2">
             <a:extLst xmlns:a="http://schemas.openxmlformats.org/drawingml/2006/main">
               <a:ext uri="{FF2B5EF4-FFF2-40B4-BE49-F238E27FC236}">
-                <a16:creationId xmlns:a16="http://schemas.microsoft.com/office/drawing/2014/main" id="{606BB9B3-9999-4F02-A015-38F56213FB1B}"/>
+                <a16:creationId xmlns:a16="http://schemas.microsoft.com/office/drawing/2014/main" id="{496CC445-8CC3-4800-B533-C2C53C7445F6}"/>
               </a:ext>
             </a:extLst>
           </p:cNvPr>
@@ -2356,7 +2402,7 @@
           <p:cNvPr id="5" name="node-1">
             <a:extLst xmlns:a="http://schemas.openxmlformats.org/drawingml/2006/main">
               <a:ext uri="{FF2B5EF4-FFF2-40B4-BE49-F238E27FC236}">
-                <a16:creationId xmlns:a16="http://schemas.microsoft.com/office/drawing/2014/main" id="{DD622B7D-B313-484B-B923-C8F3D1CC5BEA}"/>
+                <a16:creationId xmlns:a16="http://schemas.microsoft.com/office/drawing/2014/main" id="{4298E314-79C1-4F65-B826-D6B53E354E02}"/>
               </a:ext>
             </a:extLst>
           </p:cNvPr>
@@ -2418,7 +2464,7 @@
           <p:cNvPr id="6" name="node-2">
             <a:extLst xmlns:a="http://schemas.openxmlformats.org/drawingml/2006/main">
               <a:ext uri="{FF2B5EF4-FFF2-40B4-BE49-F238E27FC236}">
-                <a16:creationId xmlns:a16="http://schemas.microsoft.com/office/drawing/2014/main" id="{11BA838C-138E-45D8-A942-02CADD5647A9}"/>
+                <a16:creationId xmlns:a16="http://schemas.microsoft.com/office/drawing/2014/main" id="{4E3464C1-F00B-438C-9B1E-CAC174659FBC}"/>
               </a:ext>
             </a:extLst>
           </p:cNvPr>
@@ -2480,7 +2526,7 @@
           <p:cNvPr id="7" name="node-3">
             <a:extLst xmlns:a="http://schemas.openxmlformats.org/drawingml/2006/main">
               <a:ext uri="{FF2B5EF4-FFF2-40B4-BE49-F238E27FC236}">
-                <a16:creationId xmlns:a16="http://schemas.microsoft.com/office/drawing/2014/main" id="{89524808-E504-4359-8628-AF87A236A663}"/>
+                <a16:creationId xmlns:a16="http://schemas.microsoft.com/office/drawing/2014/main" id="{588D7888-51FB-4264-9ABF-8F274B40F20C}"/>
               </a:ext>
             </a:extLst>
           </p:cNvPr>
@@ -2542,7 +2588,7 @@
           <p:cNvPr id="8" name="diagram-footer">
             <a:extLst xmlns:a="http://schemas.openxmlformats.org/drawingml/2006/main">
               <a:ext uri="{FF2B5EF4-FFF2-40B4-BE49-F238E27FC236}">
-                <a16:creationId xmlns:a16="http://schemas.microsoft.com/office/drawing/2014/main" id="{1960B848-D687-48D2-8355-882D321934AC}"/>
+                <a16:creationId xmlns:a16="http://schemas.microsoft.com/office/drawing/2014/main" id="{1B3344E4-DF81-4ADF-93F0-F30A75658151}"/>
               </a:ext>
             </a:extLst>
           </p:cNvPr>
@@ -2598,7 +2644,7 @@
     </p:spTree>
     <p:extLst>
       <p:ext uri="{BB962C8B-B14F-4D97-AF65-F5344CB8AC3E}">
-        <p14:creationId xmlns:p14="http://schemas.microsoft.com/office/powerpoint/2010/main" val="1669760701"/>
+        <p14:creationId xmlns:p14="http://schemas.microsoft.com/office/powerpoint/2010/main" val="106368141"/>
       </p:ext>
     </p:extLst>
   </p:cSld>
@@ -2629,7 +2675,7 @@
           <p:cNvPr id="13" name="title-4">
             <a:extLst xmlns:a="http://schemas.openxmlformats.org/drawingml/2006/main">
               <a:ext uri="{FF2B5EF4-FFF2-40B4-BE49-F238E27FC236}">
-                <a16:creationId xmlns:a16="http://schemas.microsoft.com/office/drawing/2014/main" id="{F7A33EA3-B77B-4D84-A092-95C8FB77625D}"/>
+                <a16:creationId xmlns:a16="http://schemas.microsoft.com/office/drawing/2014/main" id="{0AE7D7C4-A043-4BD1-8034-4300E0D4B7CC}"/>
               </a:ext>
             </a:extLst>
           </p:cNvPr>
@@ -2687,7 +2733,7 @@
           <p:cNvPr id="2" name="number-4">
             <a:extLst xmlns:a="http://schemas.openxmlformats.org/drawingml/2006/main">
               <a:ext uri="{FF2B5EF4-FFF2-40B4-BE49-F238E27FC236}">
-                <a16:creationId xmlns:a16="http://schemas.microsoft.com/office/drawing/2014/main" id="{EB05E460-0721-46A0-8A5A-D73D4B654AA8}"/>
+                <a16:creationId xmlns:a16="http://schemas.microsoft.com/office/drawing/2014/main" id="{BF0A1FE3-3C82-4A57-BB0C-5826D1D784EF}"/>
               </a:ext>
             </a:extLst>
           </p:cNvPr>
@@ -2745,7 +2791,7 @@
           <p:cNvPr id="3" name="cell-0-0">
             <a:extLst xmlns:a="http://schemas.openxmlformats.org/drawingml/2006/main">
               <a:ext uri="{FF2B5EF4-FFF2-40B4-BE49-F238E27FC236}">
-                <a16:creationId xmlns:a16="http://schemas.microsoft.com/office/drawing/2014/main" id="{1DAB4536-FA1E-4789-8F8C-4E0E5011186E}"/>
+                <a16:creationId xmlns:a16="http://schemas.microsoft.com/office/drawing/2014/main" id="{A1EBF203-4116-4FF8-8365-4036865E57A3}"/>
               </a:ext>
             </a:extLst>
           </p:cNvPr>
@@ -2807,7 +2853,7 @@
           <p:cNvPr id="4" name="cell-0-1">
             <a:extLst xmlns:a="http://schemas.openxmlformats.org/drawingml/2006/main">
               <a:ext uri="{FF2B5EF4-FFF2-40B4-BE49-F238E27FC236}">
-                <a16:creationId xmlns:a16="http://schemas.microsoft.com/office/drawing/2014/main" id="{583646F7-C062-4DF1-A5CF-E3101B7B196A}"/>
+                <a16:creationId xmlns:a16="http://schemas.microsoft.com/office/drawing/2014/main" id="{58335D89-2AAE-44CC-8742-46F76282641F}"/>
               </a:ext>
             </a:extLst>
           </p:cNvPr>
@@ -2869,7 +2915,7 @@
           <p:cNvPr id="5" name="cell-1-0">
             <a:extLst xmlns:a="http://schemas.openxmlformats.org/drawingml/2006/main">
               <a:ext uri="{FF2B5EF4-FFF2-40B4-BE49-F238E27FC236}">
-                <a16:creationId xmlns:a16="http://schemas.microsoft.com/office/drawing/2014/main" id="{141028E4-CCB4-468C-8F16-0D2F6CD55F9C}"/>
+                <a16:creationId xmlns:a16="http://schemas.microsoft.com/office/drawing/2014/main" id="{2B12B6E2-5D80-436F-BB68-736ACD36BB66}"/>
               </a:ext>
             </a:extLst>
           </p:cNvPr>
@@ -2931,7 +2977,7 @@
           <p:cNvPr id="6" name="cell-1-1">
             <a:extLst xmlns:a="http://schemas.openxmlformats.org/drawingml/2006/main">
               <a:ext uri="{FF2B5EF4-FFF2-40B4-BE49-F238E27FC236}">
-                <a16:creationId xmlns:a16="http://schemas.microsoft.com/office/drawing/2014/main" id="{BE70C796-D2BB-40E3-88B1-FED3614C79D7}"/>
+                <a16:creationId xmlns:a16="http://schemas.microsoft.com/office/drawing/2014/main" id="{FBC0483F-6C27-4C01-BCCC-D6299B8E7F18}"/>
               </a:ext>
             </a:extLst>
           </p:cNvPr>
@@ -2993,7 +3039,7 @@
           <p:cNvPr id="7" name="cell-2-0">
             <a:extLst xmlns:a="http://schemas.openxmlformats.org/drawingml/2006/main">
               <a:ext uri="{FF2B5EF4-FFF2-40B4-BE49-F238E27FC236}">
-                <a16:creationId xmlns:a16="http://schemas.microsoft.com/office/drawing/2014/main" id="{438D86D9-C622-42B2-B3A9-EAC7E4300FA4}"/>
+                <a16:creationId xmlns:a16="http://schemas.microsoft.com/office/drawing/2014/main" id="{A2CCED1E-2ADC-4C52-A4FE-B43A47347A1E}"/>
               </a:ext>
             </a:extLst>
           </p:cNvPr>
@@ -3055,7 +3101,7 @@
           <p:cNvPr id="8" name="cell-2-1">
             <a:extLst xmlns:a="http://schemas.openxmlformats.org/drawingml/2006/main">
               <a:ext uri="{FF2B5EF4-FFF2-40B4-BE49-F238E27FC236}">
-                <a16:creationId xmlns:a16="http://schemas.microsoft.com/office/drawing/2014/main" id="{B7D566E2-CE4D-442B-A02D-9662FFD41CEA}"/>
+                <a16:creationId xmlns:a16="http://schemas.microsoft.com/office/drawing/2014/main" id="{EB3AC1FA-CAE7-4427-8648-93B4EF05E034}"/>
               </a:ext>
             </a:extLst>
           </p:cNvPr>
@@ -3117,7 +3163,7 @@
           <p:cNvPr id="9" name="cell-3-0">
             <a:extLst xmlns:a="http://schemas.openxmlformats.org/drawingml/2006/main">
               <a:ext uri="{FF2B5EF4-FFF2-40B4-BE49-F238E27FC236}">
-                <a16:creationId xmlns:a16="http://schemas.microsoft.com/office/drawing/2014/main" id="{91C0A238-E18F-4DD7-A274-C24993C0858C}"/>
+                <a16:creationId xmlns:a16="http://schemas.microsoft.com/office/drawing/2014/main" id="{9E804CF6-4CB2-4330-BDD8-6E5151B8E800}"/>
               </a:ext>
             </a:extLst>
           </p:cNvPr>
@@ -3179,7 +3225,7 @@
           <p:cNvPr id="10" name="cell-3-1">
             <a:extLst xmlns:a="http://schemas.openxmlformats.org/drawingml/2006/main">
               <a:ext uri="{FF2B5EF4-FFF2-40B4-BE49-F238E27FC236}">
-                <a16:creationId xmlns:a16="http://schemas.microsoft.com/office/drawing/2014/main" id="{D5DD16F3-31F9-4815-A1D7-D68C4DDDF974}"/>
+                <a16:creationId xmlns:a16="http://schemas.microsoft.com/office/drawing/2014/main" id="{E6BFE7CF-8BA6-464E-84BC-D5C67E50B062}"/>
               </a:ext>
             </a:extLst>
           </p:cNvPr>
@@ -3241,7 +3287,7 @@
           <p:cNvPr id="11" name="cell-4-0">
             <a:extLst xmlns:a="http://schemas.openxmlformats.org/drawingml/2006/main">
               <a:ext uri="{FF2B5EF4-FFF2-40B4-BE49-F238E27FC236}">
-                <a16:creationId xmlns:a16="http://schemas.microsoft.com/office/drawing/2014/main" id="{D20F41E1-9AD5-406E-B57A-9EEF81513438}"/>
+                <a16:creationId xmlns:a16="http://schemas.microsoft.com/office/drawing/2014/main" id="{1FA4CBFE-2B15-4EA5-9B14-1426A38851FF}"/>
               </a:ext>
             </a:extLst>
           </p:cNvPr>
@@ -3303,7 +3349,7 @@
           <p:cNvPr id="12" name="cell-4-1">
             <a:extLst xmlns:a="http://schemas.openxmlformats.org/drawingml/2006/main">
               <a:ext uri="{FF2B5EF4-FFF2-40B4-BE49-F238E27FC236}">
-                <a16:creationId xmlns:a16="http://schemas.microsoft.com/office/drawing/2014/main" id="{9912A3C7-4EE3-4881-83D8-0A90D55B560B}"/>
+                <a16:creationId xmlns:a16="http://schemas.microsoft.com/office/drawing/2014/main" id="{D7E8DD20-58E4-4A1A-A2D0-865FA9459191}"/>
               </a:ext>
             </a:extLst>
           </p:cNvPr>
@@ -3363,7 +3409,7 @@
     </p:spTree>
     <p:extLst>
       <p:ext uri="{BB962C8B-B14F-4D97-AF65-F5344CB8AC3E}">
-        <p14:creationId xmlns:p14="http://schemas.microsoft.com/office/powerpoint/2010/main" val="1671330383"/>
+        <p14:creationId xmlns:p14="http://schemas.microsoft.com/office/powerpoint/2010/main" val="1694841850"/>
       </p:ext>
     </p:extLst>
   </p:cSld>
@@ -3394,7 +3440,7 @@
           <p:cNvPr id="12" name="title-5">
             <a:extLst xmlns:a="http://schemas.openxmlformats.org/drawingml/2006/main">
               <a:ext uri="{FF2B5EF4-FFF2-40B4-BE49-F238E27FC236}">
-                <a16:creationId xmlns:a16="http://schemas.microsoft.com/office/drawing/2014/main" id="{B172C2A7-D71E-4CFA-B64D-7CBB99284E20}"/>
+                <a16:creationId xmlns:a16="http://schemas.microsoft.com/office/drawing/2014/main" id="{954AC569-BA54-471D-88B0-3A9EAA735FE6}"/>
               </a:ext>
             </a:extLst>
           </p:cNvPr>
@@ -3452,7 +3498,7 @@
           <p:cNvPr id="2" name="number-5">
             <a:extLst xmlns:a="http://schemas.openxmlformats.org/drawingml/2006/main">
               <a:ext uri="{FF2B5EF4-FFF2-40B4-BE49-F238E27FC236}">
-                <a16:creationId xmlns:a16="http://schemas.microsoft.com/office/drawing/2014/main" id="{FC4DC625-78CC-4E0E-A5DD-F28E49A7F9E7}"/>
+                <a16:creationId xmlns:a16="http://schemas.microsoft.com/office/drawing/2014/main" id="{9683147E-C802-463E-B2FF-54E9E11950C3}"/>
               </a:ext>
             </a:extLst>
           </p:cNvPr>
@@ -3510,7 +3556,7 @@
           <p:cNvPr id="3" name="stat-panel-0">
             <a:extLst xmlns:a="http://schemas.openxmlformats.org/drawingml/2006/main">
               <a:ext uri="{FF2B5EF4-FFF2-40B4-BE49-F238E27FC236}">
-                <a16:creationId xmlns:a16="http://schemas.microsoft.com/office/drawing/2014/main" id="{5D386AFA-3DC3-40B9-9F10-A6DD05BD07A7}"/>
+                <a16:creationId xmlns:a16="http://schemas.microsoft.com/office/drawing/2014/main" id="{1000B9DF-064C-4CAC-8B3F-8F70A1725B27}"/>
               </a:ext>
             </a:extLst>
           </p:cNvPr>
@@ -3541,7 +3587,7 @@
           <p:cNvPr id="4" name="stat-0">
             <a:extLst xmlns:a="http://schemas.openxmlformats.org/drawingml/2006/main">
               <a:ext uri="{FF2B5EF4-FFF2-40B4-BE49-F238E27FC236}">
-                <a16:creationId xmlns:a16="http://schemas.microsoft.com/office/drawing/2014/main" id="{3C64BF31-1397-41AE-BF28-1A1FF121F8F5}"/>
+                <a16:creationId xmlns:a16="http://schemas.microsoft.com/office/drawing/2014/main" id="{D41D4068-9FBB-4DE4-9F73-7E5701D656C9}"/>
               </a:ext>
             </a:extLst>
           </p:cNvPr>
@@ -3599,7 +3645,7 @@
           <p:cNvPr id="5" name="stat-caption-0">
             <a:extLst xmlns:a="http://schemas.openxmlformats.org/drawingml/2006/main">
               <a:ext uri="{FF2B5EF4-FFF2-40B4-BE49-F238E27FC236}">
-                <a16:creationId xmlns:a16="http://schemas.microsoft.com/office/drawing/2014/main" id="{0B289F68-C5E7-4964-A7AB-E7467417DCAF}"/>
+                <a16:creationId xmlns:a16="http://schemas.microsoft.com/office/drawing/2014/main" id="{652DEA83-2221-45E3-B53E-1F82B8CE309B}"/>
               </a:ext>
             </a:extLst>
           </p:cNvPr>
@@ -3657,7 +3703,7 @@
           <p:cNvPr id="6" name="stat-panel-1">
             <a:extLst xmlns:a="http://schemas.openxmlformats.org/drawingml/2006/main">
               <a:ext uri="{FF2B5EF4-FFF2-40B4-BE49-F238E27FC236}">
-                <a16:creationId xmlns:a16="http://schemas.microsoft.com/office/drawing/2014/main" id="{24F062E7-C7D1-41AD-BBBB-6B7886DA6C44}"/>
+                <a16:creationId xmlns:a16="http://schemas.microsoft.com/office/drawing/2014/main" id="{470D61F1-0D75-44E6-B9ED-181EB2E0982E}"/>
               </a:ext>
             </a:extLst>
           </p:cNvPr>
@@ -3688,7 +3734,7 @@
           <p:cNvPr id="7" name="stat-1">
             <a:extLst xmlns:a="http://schemas.openxmlformats.org/drawingml/2006/main">
               <a:ext uri="{FF2B5EF4-FFF2-40B4-BE49-F238E27FC236}">
-                <a16:creationId xmlns:a16="http://schemas.microsoft.com/office/drawing/2014/main" id="{10AEBCD4-18C6-47DB-B2D4-33FFB154F128}"/>
+                <a16:creationId xmlns:a16="http://schemas.microsoft.com/office/drawing/2014/main" id="{0D715BFE-D147-48E1-9C63-BDC9D4C2FD85}"/>
               </a:ext>
             </a:extLst>
           </p:cNvPr>
@@ -3746,7 +3792,7 @@
           <p:cNvPr id="8" name="stat-caption-1">
             <a:extLst xmlns:a="http://schemas.openxmlformats.org/drawingml/2006/main">
               <a:ext uri="{FF2B5EF4-FFF2-40B4-BE49-F238E27FC236}">
-                <a16:creationId xmlns:a16="http://schemas.microsoft.com/office/drawing/2014/main" id="{D14E2FEC-8ED8-4E82-93EB-62EBA6530DF0}"/>
+                <a16:creationId xmlns:a16="http://schemas.microsoft.com/office/drawing/2014/main" id="{7193DDA4-3C66-4F16-90DA-81704DDFBD1C}"/>
               </a:ext>
             </a:extLst>
           </p:cNvPr>
@@ -3804,7 +3850,7 @@
           <p:cNvPr id="9" name="stat-panel-2">
             <a:extLst xmlns:a="http://schemas.openxmlformats.org/drawingml/2006/main">
               <a:ext uri="{FF2B5EF4-FFF2-40B4-BE49-F238E27FC236}">
-                <a16:creationId xmlns:a16="http://schemas.microsoft.com/office/drawing/2014/main" id="{C76843ED-AF53-44E7-8BBA-1E01FC11D066}"/>
+                <a16:creationId xmlns:a16="http://schemas.microsoft.com/office/drawing/2014/main" id="{0D7BB9B5-3488-458D-901D-A58F37740834}"/>
               </a:ext>
             </a:extLst>
           </p:cNvPr>
@@ -3835,7 +3881,7 @@
           <p:cNvPr id="10" name="stat-2">
             <a:extLst xmlns:a="http://schemas.openxmlformats.org/drawingml/2006/main">
               <a:ext uri="{FF2B5EF4-FFF2-40B4-BE49-F238E27FC236}">
-                <a16:creationId xmlns:a16="http://schemas.microsoft.com/office/drawing/2014/main" id="{673F88F9-DA1A-4AA8-9641-4336978E5AA9}"/>
+                <a16:creationId xmlns:a16="http://schemas.microsoft.com/office/drawing/2014/main" id="{DA52C00E-2277-490C-81EC-910C8C2639A0}"/>
               </a:ext>
             </a:extLst>
           </p:cNvPr>
@@ -3893,7 +3939,7 @@
           <p:cNvPr id="11" name="stat-caption-2">
             <a:extLst xmlns:a="http://schemas.openxmlformats.org/drawingml/2006/main">
               <a:ext uri="{FF2B5EF4-FFF2-40B4-BE49-F238E27FC236}">
-                <a16:creationId xmlns:a16="http://schemas.microsoft.com/office/drawing/2014/main" id="{108B4981-27FC-4672-AD37-2D05265478B3}"/>
+                <a16:creationId xmlns:a16="http://schemas.microsoft.com/office/drawing/2014/main" id="{49A7FFDD-6C42-47AC-ABB4-B6E79354162A}"/>
               </a:ext>
             </a:extLst>
           </p:cNvPr>
@@ -3949,7 +3995,7 @@
     </p:spTree>
     <p:extLst>
       <p:ext uri="{BB962C8B-B14F-4D97-AF65-F5344CB8AC3E}">
-        <p14:creationId xmlns:p14="http://schemas.microsoft.com/office/powerpoint/2010/main" val="874154087"/>
+        <p14:creationId xmlns:p14="http://schemas.microsoft.com/office/powerpoint/2010/main" val="1594212215"/>
       </p:ext>
     </p:extLst>
   </p:cSld>
@@ -3980,7 +4026,7 @@
           <p:cNvPr id="9" name="title-6">
             <a:extLst xmlns:a="http://schemas.openxmlformats.org/drawingml/2006/main">
               <a:ext uri="{FF2B5EF4-FFF2-40B4-BE49-F238E27FC236}">
-                <a16:creationId xmlns:a16="http://schemas.microsoft.com/office/drawing/2014/main" id="{078C342A-2449-4B75-A50C-23E5C7C760DD}"/>
+                <a16:creationId xmlns:a16="http://schemas.microsoft.com/office/drawing/2014/main" id="{ABB303DB-4442-4830-91B6-D2A6CFCD4071}"/>
               </a:ext>
             </a:extLst>
           </p:cNvPr>
@@ -4038,7 +4084,7 @@
           <p:cNvPr id="2" name="number-6">
             <a:extLst xmlns:a="http://schemas.openxmlformats.org/drawingml/2006/main">
               <a:ext uri="{FF2B5EF4-FFF2-40B4-BE49-F238E27FC236}">
-                <a16:creationId xmlns:a16="http://schemas.microsoft.com/office/drawing/2014/main" id="{4D819D77-E68C-4500-A762-4DB7C5D8C3B2}"/>
+                <a16:creationId xmlns:a16="http://schemas.microsoft.com/office/drawing/2014/main" id="{774F36CD-53D3-47BD-A6EC-8BE747D8A098}"/>
               </a:ext>
             </a:extLst>
           </p:cNvPr>
@@ -4096,7 +4142,7 @@
           <p:cNvPr id="3" name="step-num-0">
             <a:extLst xmlns:a="http://schemas.openxmlformats.org/drawingml/2006/main">
               <a:ext uri="{FF2B5EF4-FFF2-40B4-BE49-F238E27FC236}">
-                <a16:creationId xmlns:a16="http://schemas.microsoft.com/office/drawing/2014/main" id="{EF8C45B9-8A9E-420F-8A3B-12293DF0EBD1}"/>
+                <a16:creationId xmlns:a16="http://schemas.microsoft.com/office/drawing/2014/main" id="{40F0F5CD-AC50-4705-B4E4-34E4D9CC9622}"/>
               </a:ext>
             </a:extLst>
           </p:cNvPr>
@@ -4156,7 +4202,7 @@
           <p:cNvPr id="4" name="step-0">
             <a:extLst xmlns:a="http://schemas.openxmlformats.org/drawingml/2006/main">
               <a:ext uri="{FF2B5EF4-FFF2-40B4-BE49-F238E27FC236}">
-                <a16:creationId xmlns:a16="http://schemas.microsoft.com/office/drawing/2014/main" id="{1C8E5D51-F86C-4B84-966F-2FD15EC7EBFD}"/>
+                <a16:creationId xmlns:a16="http://schemas.microsoft.com/office/drawing/2014/main" id="{53282B88-2F16-422B-ACB9-766A456679A9}"/>
               </a:ext>
             </a:extLst>
           </p:cNvPr>
@@ -4214,7 +4260,7 @@
           <p:cNvPr id="5" name="step-num-1">
             <a:extLst xmlns:a="http://schemas.openxmlformats.org/drawingml/2006/main">
               <a:ext uri="{FF2B5EF4-FFF2-40B4-BE49-F238E27FC236}">
-                <a16:creationId xmlns:a16="http://schemas.microsoft.com/office/drawing/2014/main" id="{CBA72FB5-EB84-4907-81CB-006F5FE8C277}"/>
+                <a16:creationId xmlns:a16="http://schemas.microsoft.com/office/drawing/2014/main" id="{8FDAFC85-29CE-44E9-8746-88B91C415BCC}"/>
               </a:ext>
             </a:extLst>
           </p:cNvPr>
@@ -4274,7 +4320,7 @@
           <p:cNvPr id="6" name="step-1">
             <a:extLst xmlns:a="http://schemas.openxmlformats.org/drawingml/2006/main">
               <a:ext uri="{FF2B5EF4-FFF2-40B4-BE49-F238E27FC236}">
-                <a16:creationId xmlns:a16="http://schemas.microsoft.com/office/drawing/2014/main" id="{413B4E42-6AE6-4108-A0E8-D7127FCF1410}"/>
+                <a16:creationId xmlns:a16="http://schemas.microsoft.com/office/drawing/2014/main" id="{2F0C0FAF-AD72-4D28-89D5-224221C7639E}"/>
               </a:ext>
             </a:extLst>
           </p:cNvPr>
@@ -4332,7 +4378,7 @@
           <p:cNvPr id="7" name="step-num-2">
             <a:extLst xmlns:a="http://schemas.openxmlformats.org/drawingml/2006/main">
               <a:ext uri="{FF2B5EF4-FFF2-40B4-BE49-F238E27FC236}">
-                <a16:creationId xmlns:a16="http://schemas.microsoft.com/office/drawing/2014/main" id="{1F8BC04D-9BC9-4F2B-BB4B-F7F9AA46A7D5}"/>
+                <a16:creationId xmlns:a16="http://schemas.microsoft.com/office/drawing/2014/main" id="{02276F05-23CF-424C-AE11-7C51405DA4D5}"/>
               </a:ext>
             </a:extLst>
           </p:cNvPr>
@@ -4392,7 +4438,7 @@
           <p:cNvPr id="8" name="step-2">
             <a:extLst xmlns:a="http://schemas.openxmlformats.org/drawingml/2006/main">
               <a:ext uri="{FF2B5EF4-FFF2-40B4-BE49-F238E27FC236}">
-                <a16:creationId xmlns:a16="http://schemas.microsoft.com/office/drawing/2014/main" id="{C138D39B-65DC-4CD8-8858-1CB96693EB19}"/>
+                <a16:creationId xmlns:a16="http://schemas.microsoft.com/office/drawing/2014/main" id="{C3FADEFE-76F0-43A2-AC70-5191AC08B7D6}"/>
               </a:ext>
             </a:extLst>
           </p:cNvPr>
@@ -4448,7 +4494,7 @@
     </p:spTree>
     <p:extLst>
       <p:ext uri="{BB962C8B-B14F-4D97-AF65-F5344CB8AC3E}">
-        <p14:creationId xmlns:p14="http://schemas.microsoft.com/office/powerpoint/2010/main" val="34244267"/>
+        <p14:creationId xmlns:p14="http://schemas.microsoft.com/office/powerpoint/2010/main" val="1544792779"/>
       </p:ext>
     </p:extLst>
   </p:cSld>

--- a/tests/formats/output/studio-live-service-rpg-economy/brief.pptx
+++ b/tests/formats/output/studio-live-service-rpg-economy/brief.pptx
@@ -2,18 +2,18 @@
 <file path=ppt/presentation.xml><?xml version="1.0" encoding="utf-8"?>
 <p:presentation xmlns:p="http://schemas.openxmlformats.org/presentationml/2006/main">
   <p:sldMasterIdLst>
-    <p:sldMasterId xmlns:r="http://schemas.openxmlformats.org/officeDocument/2006/relationships" id="2147483648" r:id="R8865590c85384705"/>
+    <p:sldMasterId xmlns:r="http://schemas.openxmlformats.org/officeDocument/2006/relationships" id="2147483648" r:id="R4b4ef37e6cf04250"/>
   </p:sldMasterIdLst>
   <p:notesMasterIdLst>
-    <p:notesMasterId xmlns:r="http://schemas.openxmlformats.org/officeDocument/2006/relationships" r:id="R11a86e67ff9745b7"/>
+    <p:notesMasterId xmlns:r="http://schemas.openxmlformats.org/officeDocument/2006/relationships" r:id="R5126c9c0dbbd4819"/>
   </p:notesMasterIdLst>
   <p:sldIdLst>
-    <p:sldId xmlns:r="http://schemas.openxmlformats.org/officeDocument/2006/relationships" id="256" r:id="R72afd28de7054e8e"/>
-    <p:sldId xmlns:r="http://schemas.openxmlformats.org/officeDocument/2006/relationships" id="257" r:id="Re2780e3234be48da"/>
-    <p:sldId xmlns:r="http://schemas.openxmlformats.org/officeDocument/2006/relationships" id="258" r:id="Red8362c99591402a"/>
-    <p:sldId xmlns:r="http://schemas.openxmlformats.org/officeDocument/2006/relationships" id="259" r:id="Raf8f585b8aea43bb"/>
-    <p:sldId xmlns:r="http://schemas.openxmlformats.org/officeDocument/2006/relationships" id="260" r:id="R0f91aca69bd0442f"/>
-    <p:sldId xmlns:r="http://schemas.openxmlformats.org/officeDocument/2006/relationships" id="261" r:id="Rfb3e891c80224aed"/>
+    <p:sldId xmlns:r="http://schemas.openxmlformats.org/officeDocument/2006/relationships" id="256" r:id="Rfd805d7cd0c0457b"/>
+    <p:sldId xmlns:r="http://schemas.openxmlformats.org/officeDocument/2006/relationships" id="257" r:id="Rfd7430134e1a48ec"/>
+    <p:sldId xmlns:r="http://schemas.openxmlformats.org/officeDocument/2006/relationships" id="258" r:id="Ra4ee1b1394d344c5"/>
+    <p:sldId xmlns:r="http://schemas.openxmlformats.org/officeDocument/2006/relationships" id="259" r:id="Rccf6ee34de04402f"/>
+    <p:sldId xmlns:r="http://schemas.openxmlformats.org/officeDocument/2006/relationships" id="260" r:id="Rbe31c8a963064b01"/>
+    <p:sldId xmlns:r="http://schemas.openxmlformats.org/officeDocument/2006/relationships" id="261" r:id="Rd9c2dcd245be462c"/>
   </p:sldIdLst>
   <p:sldSz cx="12192000" cy="6858000"/>
   <p:notesSz cx="6858000" cy="9144000"/>
@@ -900,7 +900,7 @@
   </p:cSld>
   <p:clrMap bg1="lt1" tx1="dk1" bg2="lt2" tx2="dk2" accent1="accent1" accent2="accent2" accent3="accent3" accent4="accent4" accent5="accent5" accent6="accent6" hlink="hlink" folHlink="folHlink"/>
   <p:sldLayoutIdLst>
-    <p:sldLayoutId xmlns:r="http://schemas.openxmlformats.org/officeDocument/2006/relationships" id="2147483649" r:id="Ra8cf2b1844ed4bfd"/>
+    <p:sldLayoutId xmlns:r="http://schemas.openxmlformats.org/officeDocument/2006/relationships" id="2147483649" r:id="Rfc60e095f42944f9"/>
   </p:sldLayoutIdLst>
   <p:txStyles>
     <p:titleStyle>
@@ -1451,7 +1451,7 @@
           <p:cNvPr id="7" name="cover-kicker">
             <a:extLst xmlns:a="http://schemas.openxmlformats.org/drawingml/2006/main">
               <a:ext uri="{FF2B5EF4-FFF2-40B4-BE49-F238E27FC236}">
-                <a16:creationId xmlns:a16="http://schemas.microsoft.com/office/drawing/2014/main" id="{E6356420-9CFD-439D-AB4A-A0EE7716E1F8}"/>
+                <a16:creationId xmlns:a16="http://schemas.microsoft.com/office/drawing/2014/main" id="{6BAB4070-DE8C-46BA-8B92-81E3C3445344}"/>
               </a:ext>
             </a:extLst>
           </p:cNvPr>
@@ -1509,7 +1509,7 @@
           <p:cNvPr id="2" name="cover-title">
             <a:extLst xmlns:a="http://schemas.openxmlformats.org/drawingml/2006/main">
               <a:ext uri="{FF2B5EF4-FFF2-40B4-BE49-F238E27FC236}">
-                <a16:creationId xmlns:a16="http://schemas.microsoft.com/office/drawing/2014/main" id="{E8D70ED5-9FEF-41C1-9B56-869726535FF1}"/>
+                <a16:creationId xmlns:a16="http://schemas.microsoft.com/office/drawing/2014/main" id="{54AAF2C5-FA00-440F-91F8-D3AAF67F6381}"/>
               </a:ext>
             </a:extLst>
           </p:cNvPr>
@@ -1590,7 +1590,7 @@
           <p:cNvPr id="3" name="cover-subtitle">
             <a:extLst xmlns:a="http://schemas.openxmlformats.org/drawingml/2006/main">
               <a:ext uri="{FF2B5EF4-FFF2-40B4-BE49-F238E27FC236}">
-                <a16:creationId xmlns:a16="http://schemas.microsoft.com/office/drawing/2014/main" id="{4032D48D-B4B0-4267-8941-E093A40C5F19}"/>
+                <a16:creationId xmlns:a16="http://schemas.microsoft.com/office/drawing/2014/main" id="{7B610CB3-561A-40F0-9DAB-ED208EF7A07E}"/>
               </a:ext>
             </a:extLst>
           </p:cNvPr>
@@ -1648,7 +1648,7 @@
           <p:cNvPr id="4" name="cover-panel">
             <a:extLst xmlns:a="http://schemas.openxmlformats.org/drawingml/2006/main">
               <a:ext uri="{FF2B5EF4-FFF2-40B4-BE49-F238E27FC236}">
-                <a16:creationId xmlns:a16="http://schemas.microsoft.com/office/drawing/2014/main" id="{BF604451-826E-4CF6-8B76-059C24F5BB09}"/>
+                <a16:creationId xmlns:a16="http://schemas.microsoft.com/office/drawing/2014/main" id="{9B20B8CF-18DF-4D40-A9B8-5C6095ECB455}"/>
               </a:ext>
             </a:extLst>
           </p:cNvPr>
@@ -1681,7 +1681,7 @@
           <p:cNvPr id="5" name="cover-mark">
             <a:extLst xmlns:a="http://schemas.openxmlformats.org/drawingml/2006/main">
               <a:ext uri="{FF2B5EF4-FFF2-40B4-BE49-F238E27FC236}">
-                <a16:creationId xmlns:a16="http://schemas.microsoft.com/office/drawing/2014/main" id="{B81C99F9-620D-4217-BFFB-CEF7898BB5C8}"/>
+                <a16:creationId xmlns:a16="http://schemas.microsoft.com/office/drawing/2014/main" id="{F3BF4D5C-3F9F-4A23-B792-4CAB05935483}"/>
               </a:ext>
             </a:extLst>
           </p:cNvPr>
@@ -1739,7 +1739,7 @@
           <p:cNvPr id="6" name="cover-caption">
             <a:extLst xmlns:a="http://schemas.openxmlformats.org/drawingml/2006/main">
               <a:ext uri="{FF2B5EF4-FFF2-40B4-BE49-F238E27FC236}">
-                <a16:creationId xmlns:a16="http://schemas.microsoft.com/office/drawing/2014/main" id="{EA8DAF40-C3BE-45C9-9555-395A67791FA6}"/>
+                <a16:creationId xmlns:a16="http://schemas.microsoft.com/office/drawing/2014/main" id="{BF7423DB-8674-403C-ABC3-00C606CCDCD5}"/>
               </a:ext>
             </a:extLst>
           </p:cNvPr>
@@ -1795,7 +1795,7 @@
     </p:spTree>
     <p:extLst>
       <p:ext uri="{BB962C8B-B14F-4D97-AF65-F5344CB8AC3E}">
-        <p14:creationId xmlns:p14="http://schemas.microsoft.com/office/powerpoint/2010/main" val="1578555524"/>
+        <p14:creationId xmlns:p14="http://schemas.microsoft.com/office/powerpoint/2010/main" val="1170420389"/>
       </p:ext>
     </p:extLst>
   </p:cSld>
@@ -1826,7 +1826,7 @@
           <p:cNvPr id="7" name="title-2">
             <a:extLst xmlns:a="http://schemas.openxmlformats.org/drawingml/2006/main">
               <a:ext uri="{FF2B5EF4-FFF2-40B4-BE49-F238E27FC236}">
-                <a16:creationId xmlns:a16="http://schemas.microsoft.com/office/drawing/2014/main" id="{F419869B-D8D1-46DB-983F-670217D4A9AB}"/>
+                <a16:creationId xmlns:a16="http://schemas.microsoft.com/office/drawing/2014/main" id="{7ED3920F-AB06-4D20-89B5-A9C69C7EAD0A}"/>
               </a:ext>
             </a:extLst>
           </p:cNvPr>
@@ -1884,7 +1884,7 @@
           <p:cNvPr id="2" name="number-2">
             <a:extLst xmlns:a="http://schemas.openxmlformats.org/drawingml/2006/main">
               <a:ext uri="{FF2B5EF4-FFF2-40B4-BE49-F238E27FC236}">
-                <a16:creationId xmlns:a16="http://schemas.microsoft.com/office/drawing/2014/main" id="{C00563B4-9331-4C32-A22A-C841D80D454E}"/>
+                <a16:creationId xmlns:a16="http://schemas.microsoft.com/office/drawing/2014/main" id="{E84281EA-8598-4CAC-97EA-A3F6A7AC5053}"/>
               </a:ext>
             </a:extLst>
           </p:cNvPr>
@@ -1942,7 +1942,7 @@
           <p:cNvPr id="3" name="half-body">
             <a:extLst xmlns:a="http://schemas.openxmlformats.org/drawingml/2006/main">
               <a:ext uri="{FF2B5EF4-FFF2-40B4-BE49-F238E27FC236}">
-                <a16:creationId xmlns:a16="http://schemas.microsoft.com/office/drawing/2014/main" id="{48245E68-8C08-42AB-95D9-12B4DE05726F}"/>
+                <a16:creationId xmlns:a16="http://schemas.microsoft.com/office/drawing/2014/main" id="{B076E15B-A82D-41C9-9DAE-89057E56B91A}"/>
               </a:ext>
             </a:extLst>
           </p:cNvPr>
@@ -2046,7 +2046,7 @@
           <p:cNvPr id="4" name="half-visual">
             <a:extLst xmlns:a="http://schemas.openxmlformats.org/drawingml/2006/main">
               <a:ext uri="{FF2B5EF4-FFF2-40B4-BE49-F238E27FC236}">
-                <a16:creationId xmlns:a16="http://schemas.microsoft.com/office/drawing/2014/main" id="{5CB201F8-B04A-46AE-B492-4573F322980D}"/>
+                <a16:creationId xmlns:a16="http://schemas.microsoft.com/office/drawing/2014/main" id="{AE0A500D-14A3-4B68-A40E-8874EE4E88F1}"/>
               </a:ext>
             </a:extLst>
           </p:cNvPr>
@@ -2079,7 +2079,7 @@
           <p:cNvPr id="5" name="half-signal">
             <a:extLst xmlns:a="http://schemas.openxmlformats.org/drawingml/2006/main">
               <a:ext uri="{FF2B5EF4-FFF2-40B4-BE49-F238E27FC236}">
-                <a16:creationId xmlns:a16="http://schemas.microsoft.com/office/drawing/2014/main" id="{840C62B8-885B-45BC-BE9C-D3D8F00A8C8F}"/>
+                <a16:creationId xmlns:a16="http://schemas.microsoft.com/office/drawing/2014/main" id="{53A71575-8125-40C9-81CB-8D00D17A1D7E}"/>
               </a:ext>
             </a:extLst>
           </p:cNvPr>
@@ -2137,7 +2137,7 @@
           <p:cNvPr id="6" name="half-caption">
             <a:extLst xmlns:a="http://schemas.openxmlformats.org/drawingml/2006/main">
               <a:ext uri="{FF2B5EF4-FFF2-40B4-BE49-F238E27FC236}">
-                <a16:creationId xmlns:a16="http://schemas.microsoft.com/office/drawing/2014/main" id="{D575C0F1-619C-46D9-B808-65B9D2911893}"/>
+                <a16:creationId xmlns:a16="http://schemas.microsoft.com/office/drawing/2014/main" id="{254BA457-9E3D-4B6D-B1E5-4FB4DA3262B8}"/>
               </a:ext>
             </a:extLst>
           </p:cNvPr>
@@ -2193,7 +2193,7 @@
     </p:spTree>
     <p:extLst>
       <p:ext uri="{BB962C8B-B14F-4D97-AF65-F5344CB8AC3E}">
-        <p14:creationId xmlns:p14="http://schemas.microsoft.com/office/powerpoint/2010/main" val="517825332"/>
+        <p14:creationId xmlns:p14="http://schemas.microsoft.com/office/powerpoint/2010/main" val="1645418225"/>
       </p:ext>
     </p:extLst>
   </p:cSld>
@@ -2224,7 +2224,7 @@
           <p:cNvPr id="9" name="title-3">
             <a:extLst xmlns:a="http://schemas.openxmlformats.org/drawingml/2006/main">
               <a:ext uri="{FF2B5EF4-FFF2-40B4-BE49-F238E27FC236}">
-                <a16:creationId xmlns:a16="http://schemas.microsoft.com/office/drawing/2014/main" id="{7A35BA27-2F5F-4A3E-AEA5-F132D5D64AE0}"/>
+                <a16:creationId xmlns:a16="http://schemas.microsoft.com/office/drawing/2014/main" id="{65002009-DED7-4D95-9C76-986963BEC215}"/>
               </a:ext>
             </a:extLst>
           </p:cNvPr>
@@ -2282,7 +2282,7 @@
           <p:cNvPr id="2" name="number-3">
             <a:extLst xmlns:a="http://schemas.openxmlformats.org/drawingml/2006/main">
               <a:ext uri="{FF2B5EF4-FFF2-40B4-BE49-F238E27FC236}">
-                <a16:creationId xmlns:a16="http://schemas.microsoft.com/office/drawing/2014/main" id="{B07DAA16-F35B-4D35-8870-12C9D26A48D3}"/>
+                <a16:creationId xmlns:a16="http://schemas.microsoft.com/office/drawing/2014/main" id="{DE1703E9-A54B-4C3A-B644-DAA73653B723}"/>
               </a:ext>
             </a:extLst>
           </p:cNvPr>
@@ -2340,7 +2340,7 @@
           <p:cNvPr id="3" name="connector-1">
             <a:extLst xmlns:a="http://schemas.openxmlformats.org/drawingml/2006/main">
               <a:ext uri="{FF2B5EF4-FFF2-40B4-BE49-F238E27FC236}">
-                <a16:creationId xmlns:a16="http://schemas.microsoft.com/office/drawing/2014/main" id="{9AEBC2BF-CC9A-464D-8DB5-C53CAAD6AA20}"/>
+                <a16:creationId xmlns:a16="http://schemas.microsoft.com/office/drawing/2014/main" id="{E4B98FB8-6704-4FAB-AA0F-ED1DAE05D312}"/>
               </a:ext>
             </a:extLst>
           </p:cNvPr>
@@ -2371,7 +2371,7 @@
           <p:cNvPr id="4" name="connector-2">
             <a:extLst xmlns:a="http://schemas.openxmlformats.org/drawingml/2006/main">
               <a:ext uri="{FF2B5EF4-FFF2-40B4-BE49-F238E27FC236}">
-                <a16:creationId xmlns:a16="http://schemas.microsoft.com/office/drawing/2014/main" id="{496CC445-8CC3-4800-B533-C2C53C7445F6}"/>
+                <a16:creationId xmlns:a16="http://schemas.microsoft.com/office/drawing/2014/main" id="{578F27B7-489A-4584-8637-0C8FB46953ED}"/>
               </a:ext>
             </a:extLst>
           </p:cNvPr>
@@ -2402,7 +2402,7 @@
           <p:cNvPr id="5" name="node-1">
             <a:extLst xmlns:a="http://schemas.openxmlformats.org/drawingml/2006/main">
               <a:ext uri="{FF2B5EF4-FFF2-40B4-BE49-F238E27FC236}">
-                <a16:creationId xmlns:a16="http://schemas.microsoft.com/office/drawing/2014/main" id="{4298E314-79C1-4F65-B826-D6B53E354E02}"/>
+                <a16:creationId xmlns:a16="http://schemas.microsoft.com/office/drawing/2014/main" id="{C9539F6F-D00A-48C9-98C9-BECB072EEE9D}"/>
               </a:ext>
             </a:extLst>
           </p:cNvPr>
@@ -2464,7 +2464,7 @@
           <p:cNvPr id="6" name="node-2">
             <a:extLst xmlns:a="http://schemas.openxmlformats.org/drawingml/2006/main">
               <a:ext uri="{FF2B5EF4-FFF2-40B4-BE49-F238E27FC236}">
-                <a16:creationId xmlns:a16="http://schemas.microsoft.com/office/drawing/2014/main" id="{4E3464C1-F00B-438C-9B1E-CAC174659FBC}"/>
+                <a16:creationId xmlns:a16="http://schemas.microsoft.com/office/drawing/2014/main" id="{ACAAD7C7-1D0C-42D9-9892-2EDA49BF2544}"/>
               </a:ext>
             </a:extLst>
           </p:cNvPr>
@@ -2526,7 +2526,7 @@
           <p:cNvPr id="7" name="node-3">
             <a:extLst xmlns:a="http://schemas.openxmlformats.org/drawingml/2006/main">
               <a:ext uri="{FF2B5EF4-FFF2-40B4-BE49-F238E27FC236}">
-                <a16:creationId xmlns:a16="http://schemas.microsoft.com/office/drawing/2014/main" id="{588D7888-51FB-4264-9ABF-8F274B40F20C}"/>
+                <a16:creationId xmlns:a16="http://schemas.microsoft.com/office/drawing/2014/main" id="{5AFBA95C-D0B4-4988-AD41-9528E9E5EE9E}"/>
               </a:ext>
             </a:extLst>
           </p:cNvPr>
@@ -2588,7 +2588,7 @@
           <p:cNvPr id="8" name="diagram-footer">
             <a:extLst xmlns:a="http://schemas.openxmlformats.org/drawingml/2006/main">
               <a:ext uri="{FF2B5EF4-FFF2-40B4-BE49-F238E27FC236}">
-                <a16:creationId xmlns:a16="http://schemas.microsoft.com/office/drawing/2014/main" id="{1B3344E4-DF81-4ADF-93F0-F30A75658151}"/>
+                <a16:creationId xmlns:a16="http://schemas.microsoft.com/office/drawing/2014/main" id="{0F818B3B-16FA-4E9F-A5FC-CEAB33EE4870}"/>
               </a:ext>
             </a:extLst>
           </p:cNvPr>
@@ -2644,7 +2644,7 @@
     </p:spTree>
     <p:extLst>
       <p:ext uri="{BB962C8B-B14F-4D97-AF65-F5344CB8AC3E}">
-        <p14:creationId xmlns:p14="http://schemas.microsoft.com/office/powerpoint/2010/main" val="106368141"/>
+        <p14:creationId xmlns:p14="http://schemas.microsoft.com/office/powerpoint/2010/main" val="1657650825"/>
       </p:ext>
     </p:extLst>
   </p:cSld>
@@ -2675,7 +2675,7 @@
           <p:cNvPr id="13" name="title-4">
             <a:extLst xmlns:a="http://schemas.openxmlformats.org/drawingml/2006/main">
               <a:ext uri="{FF2B5EF4-FFF2-40B4-BE49-F238E27FC236}">
-                <a16:creationId xmlns:a16="http://schemas.microsoft.com/office/drawing/2014/main" id="{0AE7D7C4-A043-4BD1-8034-4300E0D4B7CC}"/>
+                <a16:creationId xmlns:a16="http://schemas.microsoft.com/office/drawing/2014/main" id="{E0281AD3-FF00-497D-A973-36DAE64AFD85}"/>
               </a:ext>
             </a:extLst>
           </p:cNvPr>
@@ -2733,7 +2733,7 @@
           <p:cNvPr id="2" name="number-4">
             <a:extLst xmlns:a="http://schemas.openxmlformats.org/drawingml/2006/main">
               <a:ext uri="{FF2B5EF4-FFF2-40B4-BE49-F238E27FC236}">
-                <a16:creationId xmlns:a16="http://schemas.microsoft.com/office/drawing/2014/main" id="{BF0A1FE3-3C82-4A57-BB0C-5826D1D784EF}"/>
+                <a16:creationId xmlns:a16="http://schemas.microsoft.com/office/drawing/2014/main" id="{29A60EEB-A10F-4442-91AE-29C63E4F0B2B}"/>
               </a:ext>
             </a:extLst>
           </p:cNvPr>
@@ -2791,7 +2791,7 @@
           <p:cNvPr id="3" name="cell-0-0">
             <a:extLst xmlns:a="http://schemas.openxmlformats.org/drawingml/2006/main">
               <a:ext uri="{FF2B5EF4-FFF2-40B4-BE49-F238E27FC236}">
-                <a16:creationId xmlns:a16="http://schemas.microsoft.com/office/drawing/2014/main" id="{A1EBF203-4116-4FF8-8365-4036865E57A3}"/>
+                <a16:creationId xmlns:a16="http://schemas.microsoft.com/office/drawing/2014/main" id="{69AD31B5-AA24-4319-820E-D86A9F5E76DA}"/>
               </a:ext>
             </a:extLst>
           </p:cNvPr>
@@ -2853,7 +2853,7 @@
           <p:cNvPr id="4" name="cell-0-1">
             <a:extLst xmlns:a="http://schemas.openxmlformats.org/drawingml/2006/main">
               <a:ext uri="{FF2B5EF4-FFF2-40B4-BE49-F238E27FC236}">
-                <a16:creationId xmlns:a16="http://schemas.microsoft.com/office/drawing/2014/main" id="{58335D89-2AAE-44CC-8742-46F76282641F}"/>
+                <a16:creationId xmlns:a16="http://schemas.microsoft.com/office/drawing/2014/main" id="{60CBBAE8-E4D2-42C0-99BF-273C77FD635A}"/>
               </a:ext>
             </a:extLst>
           </p:cNvPr>
@@ -2915,7 +2915,7 @@
           <p:cNvPr id="5" name="cell-1-0">
             <a:extLst xmlns:a="http://schemas.openxmlformats.org/drawingml/2006/main">
               <a:ext uri="{FF2B5EF4-FFF2-40B4-BE49-F238E27FC236}">
-                <a16:creationId xmlns:a16="http://schemas.microsoft.com/office/drawing/2014/main" id="{2B12B6E2-5D80-436F-BB68-736ACD36BB66}"/>
+                <a16:creationId xmlns:a16="http://schemas.microsoft.com/office/drawing/2014/main" id="{4C24F108-09EB-4388-BBEF-855428768339}"/>
               </a:ext>
             </a:extLst>
           </p:cNvPr>
@@ -2977,7 +2977,7 @@
           <p:cNvPr id="6" name="cell-1-1">
             <a:extLst xmlns:a="http://schemas.openxmlformats.org/drawingml/2006/main">
               <a:ext uri="{FF2B5EF4-FFF2-40B4-BE49-F238E27FC236}">
-                <a16:creationId xmlns:a16="http://schemas.microsoft.com/office/drawing/2014/main" id="{FBC0483F-6C27-4C01-BCCC-D6299B8E7F18}"/>
+                <a16:creationId xmlns:a16="http://schemas.microsoft.com/office/drawing/2014/main" id="{AACF1EE2-D5C2-4432-B7F7-E3B86610DCFC}"/>
               </a:ext>
             </a:extLst>
           </p:cNvPr>
@@ -3039,7 +3039,7 @@
           <p:cNvPr id="7" name="cell-2-0">
             <a:extLst xmlns:a="http://schemas.openxmlformats.org/drawingml/2006/main">
               <a:ext uri="{FF2B5EF4-FFF2-40B4-BE49-F238E27FC236}">
-                <a16:creationId xmlns:a16="http://schemas.microsoft.com/office/drawing/2014/main" id="{A2CCED1E-2ADC-4C52-A4FE-B43A47347A1E}"/>
+                <a16:creationId xmlns:a16="http://schemas.microsoft.com/office/drawing/2014/main" id="{3F1E97AE-E994-4EAA-8AA9-BBDA676CF035}"/>
               </a:ext>
             </a:extLst>
           </p:cNvPr>
@@ -3101,7 +3101,7 @@
           <p:cNvPr id="8" name="cell-2-1">
             <a:extLst xmlns:a="http://schemas.openxmlformats.org/drawingml/2006/main">
               <a:ext uri="{FF2B5EF4-FFF2-40B4-BE49-F238E27FC236}">
-                <a16:creationId xmlns:a16="http://schemas.microsoft.com/office/drawing/2014/main" id="{EB3AC1FA-CAE7-4427-8648-93B4EF05E034}"/>
+                <a16:creationId xmlns:a16="http://schemas.microsoft.com/office/drawing/2014/main" id="{212C423C-0C18-4747-BCC1-C30A2E0F0109}"/>
               </a:ext>
             </a:extLst>
           </p:cNvPr>
@@ -3163,7 +3163,7 @@
           <p:cNvPr id="9" name="cell-3-0">
             <a:extLst xmlns:a="http://schemas.openxmlformats.org/drawingml/2006/main">
               <a:ext uri="{FF2B5EF4-FFF2-40B4-BE49-F238E27FC236}">
-                <a16:creationId xmlns:a16="http://schemas.microsoft.com/office/drawing/2014/main" id="{9E804CF6-4CB2-4330-BDD8-6E5151B8E800}"/>
+                <a16:creationId xmlns:a16="http://schemas.microsoft.com/office/drawing/2014/main" id="{8C366574-E72F-4750-8CB7-200673DA581F}"/>
               </a:ext>
             </a:extLst>
           </p:cNvPr>
@@ -3225,7 +3225,7 @@
           <p:cNvPr id="10" name="cell-3-1">
             <a:extLst xmlns:a="http://schemas.openxmlformats.org/drawingml/2006/main">
               <a:ext uri="{FF2B5EF4-FFF2-40B4-BE49-F238E27FC236}">
-                <a16:creationId xmlns:a16="http://schemas.microsoft.com/office/drawing/2014/main" id="{E6BFE7CF-8BA6-464E-84BC-D5C67E50B062}"/>
+                <a16:creationId xmlns:a16="http://schemas.microsoft.com/office/drawing/2014/main" id="{91D81D33-A161-4713-AECB-C75F2F3F7F55}"/>
               </a:ext>
             </a:extLst>
           </p:cNvPr>
@@ -3287,7 +3287,7 @@
           <p:cNvPr id="11" name="cell-4-0">
             <a:extLst xmlns:a="http://schemas.openxmlformats.org/drawingml/2006/main">
               <a:ext uri="{FF2B5EF4-FFF2-40B4-BE49-F238E27FC236}">
-                <a16:creationId xmlns:a16="http://schemas.microsoft.com/office/drawing/2014/main" id="{1FA4CBFE-2B15-4EA5-9B14-1426A38851FF}"/>
+                <a16:creationId xmlns:a16="http://schemas.microsoft.com/office/drawing/2014/main" id="{32EAF38B-F814-4ABE-90BD-9E57412465A6}"/>
               </a:ext>
             </a:extLst>
           </p:cNvPr>
@@ -3349,7 +3349,7 @@
           <p:cNvPr id="12" name="cell-4-1">
             <a:extLst xmlns:a="http://schemas.openxmlformats.org/drawingml/2006/main">
               <a:ext uri="{FF2B5EF4-FFF2-40B4-BE49-F238E27FC236}">
-                <a16:creationId xmlns:a16="http://schemas.microsoft.com/office/drawing/2014/main" id="{D7E8DD20-58E4-4A1A-A2D0-865FA9459191}"/>
+                <a16:creationId xmlns:a16="http://schemas.microsoft.com/office/drawing/2014/main" id="{676875CC-C0C5-431A-AD1E-341317BA98DA}"/>
               </a:ext>
             </a:extLst>
           </p:cNvPr>
@@ -3409,7 +3409,7 @@
     </p:spTree>
     <p:extLst>
       <p:ext uri="{BB962C8B-B14F-4D97-AF65-F5344CB8AC3E}">
-        <p14:creationId xmlns:p14="http://schemas.microsoft.com/office/powerpoint/2010/main" val="1694841850"/>
+        <p14:creationId xmlns:p14="http://schemas.microsoft.com/office/powerpoint/2010/main" val="1633824706"/>
       </p:ext>
     </p:extLst>
   </p:cSld>
@@ -3440,7 +3440,7 @@
           <p:cNvPr id="12" name="title-5">
             <a:extLst xmlns:a="http://schemas.openxmlformats.org/drawingml/2006/main">
               <a:ext uri="{FF2B5EF4-FFF2-40B4-BE49-F238E27FC236}">
-                <a16:creationId xmlns:a16="http://schemas.microsoft.com/office/drawing/2014/main" id="{954AC569-BA54-471D-88B0-3A9EAA735FE6}"/>
+                <a16:creationId xmlns:a16="http://schemas.microsoft.com/office/drawing/2014/main" id="{DDE01ECE-08BA-447F-8746-AE099DD33786}"/>
               </a:ext>
             </a:extLst>
           </p:cNvPr>
@@ -3498,7 +3498,7 @@
           <p:cNvPr id="2" name="number-5">
             <a:extLst xmlns:a="http://schemas.openxmlformats.org/drawingml/2006/main">
               <a:ext uri="{FF2B5EF4-FFF2-40B4-BE49-F238E27FC236}">
-                <a16:creationId xmlns:a16="http://schemas.microsoft.com/office/drawing/2014/main" id="{9683147E-C802-463E-B2FF-54E9E11950C3}"/>
+                <a16:creationId xmlns:a16="http://schemas.microsoft.com/office/drawing/2014/main" id="{EFE3976B-0EBD-4717-BE01-316F96BFFF90}"/>
               </a:ext>
             </a:extLst>
           </p:cNvPr>
@@ -3556,7 +3556,7 @@
           <p:cNvPr id="3" name="stat-panel-0">
             <a:extLst xmlns:a="http://schemas.openxmlformats.org/drawingml/2006/main">
               <a:ext uri="{FF2B5EF4-FFF2-40B4-BE49-F238E27FC236}">
-                <a16:creationId xmlns:a16="http://schemas.microsoft.com/office/drawing/2014/main" id="{1000B9DF-064C-4CAC-8B3F-8F70A1725B27}"/>
+                <a16:creationId xmlns:a16="http://schemas.microsoft.com/office/drawing/2014/main" id="{CC507C03-5FF9-4207-AF12-2F8838B4E1DD}"/>
               </a:ext>
             </a:extLst>
           </p:cNvPr>
@@ -3587,7 +3587,7 @@
           <p:cNvPr id="4" name="stat-0">
             <a:extLst xmlns:a="http://schemas.openxmlformats.org/drawingml/2006/main">
               <a:ext uri="{FF2B5EF4-FFF2-40B4-BE49-F238E27FC236}">
-                <a16:creationId xmlns:a16="http://schemas.microsoft.com/office/drawing/2014/main" id="{D41D4068-9FBB-4DE4-9F73-7E5701D656C9}"/>
+                <a16:creationId xmlns:a16="http://schemas.microsoft.com/office/drawing/2014/main" id="{FCE81EFF-1C3C-4C3A-B401-B1E0830DA6E7}"/>
               </a:ext>
             </a:extLst>
           </p:cNvPr>
@@ -3645,7 +3645,7 @@
           <p:cNvPr id="5" name="stat-caption-0">
             <a:extLst xmlns:a="http://schemas.openxmlformats.org/drawingml/2006/main">
               <a:ext uri="{FF2B5EF4-FFF2-40B4-BE49-F238E27FC236}">
-                <a16:creationId xmlns:a16="http://schemas.microsoft.com/office/drawing/2014/main" id="{652DEA83-2221-45E3-B53E-1F82B8CE309B}"/>
+                <a16:creationId xmlns:a16="http://schemas.microsoft.com/office/drawing/2014/main" id="{FF26021F-3EBD-40C6-8246-58142CB34501}"/>
               </a:ext>
             </a:extLst>
           </p:cNvPr>
@@ -3703,7 +3703,7 @@
           <p:cNvPr id="6" name="stat-panel-1">
             <a:extLst xmlns:a="http://schemas.openxmlformats.org/drawingml/2006/main">
               <a:ext uri="{FF2B5EF4-FFF2-40B4-BE49-F238E27FC236}">
-                <a16:creationId xmlns:a16="http://schemas.microsoft.com/office/drawing/2014/main" id="{470D61F1-0D75-44E6-B9ED-181EB2E0982E}"/>
+                <a16:creationId xmlns:a16="http://schemas.microsoft.com/office/drawing/2014/main" id="{E20AD2D3-786C-4968-AEB3-C6FF2F7E94F9}"/>
               </a:ext>
             </a:extLst>
           </p:cNvPr>
@@ -3734,7 +3734,7 @@
           <p:cNvPr id="7" name="stat-1">
             <a:extLst xmlns:a="http://schemas.openxmlformats.org/drawingml/2006/main">
               <a:ext uri="{FF2B5EF4-FFF2-40B4-BE49-F238E27FC236}">
-                <a16:creationId xmlns:a16="http://schemas.microsoft.com/office/drawing/2014/main" id="{0D715BFE-D147-48E1-9C63-BDC9D4C2FD85}"/>
+                <a16:creationId xmlns:a16="http://schemas.microsoft.com/office/drawing/2014/main" id="{DB1041B1-E86D-4777-A782-B14BB04469E0}"/>
               </a:ext>
             </a:extLst>
           </p:cNvPr>
@@ -3792,7 +3792,7 @@
           <p:cNvPr id="8" name="stat-caption-1">
             <a:extLst xmlns:a="http://schemas.openxmlformats.org/drawingml/2006/main">
               <a:ext uri="{FF2B5EF4-FFF2-40B4-BE49-F238E27FC236}">
-                <a16:creationId xmlns:a16="http://schemas.microsoft.com/office/drawing/2014/main" id="{7193DDA4-3C66-4F16-90DA-81704DDFBD1C}"/>
+                <a16:creationId xmlns:a16="http://schemas.microsoft.com/office/drawing/2014/main" id="{02E83D6C-AA28-440D-AE16-D2E2AF7B821A}"/>
               </a:ext>
             </a:extLst>
           </p:cNvPr>
@@ -3850,7 +3850,7 @@
           <p:cNvPr id="9" name="stat-panel-2">
             <a:extLst xmlns:a="http://schemas.openxmlformats.org/drawingml/2006/main">
               <a:ext uri="{FF2B5EF4-FFF2-40B4-BE49-F238E27FC236}">
-                <a16:creationId xmlns:a16="http://schemas.microsoft.com/office/drawing/2014/main" id="{0D7BB9B5-3488-458D-901D-A58F37740834}"/>
+                <a16:creationId xmlns:a16="http://schemas.microsoft.com/office/drawing/2014/main" id="{55A00D10-21A9-44C6-B388-8EB7D9BD3770}"/>
               </a:ext>
             </a:extLst>
           </p:cNvPr>
@@ -3881,7 +3881,7 @@
           <p:cNvPr id="10" name="stat-2">
             <a:extLst xmlns:a="http://schemas.openxmlformats.org/drawingml/2006/main">
               <a:ext uri="{FF2B5EF4-FFF2-40B4-BE49-F238E27FC236}">
-                <a16:creationId xmlns:a16="http://schemas.microsoft.com/office/drawing/2014/main" id="{DA52C00E-2277-490C-81EC-910C8C2639A0}"/>
+                <a16:creationId xmlns:a16="http://schemas.microsoft.com/office/drawing/2014/main" id="{F19FFEA7-BFF5-4BBE-A6B1-20F7B8E4C6CC}"/>
               </a:ext>
             </a:extLst>
           </p:cNvPr>
@@ -3939,7 +3939,7 @@
           <p:cNvPr id="11" name="stat-caption-2">
             <a:extLst xmlns:a="http://schemas.openxmlformats.org/drawingml/2006/main">
               <a:ext uri="{FF2B5EF4-FFF2-40B4-BE49-F238E27FC236}">
-                <a16:creationId xmlns:a16="http://schemas.microsoft.com/office/drawing/2014/main" id="{49A7FFDD-6C42-47AC-ABB4-B6E79354162A}"/>
+                <a16:creationId xmlns:a16="http://schemas.microsoft.com/office/drawing/2014/main" id="{F3AB3068-9ADD-4C4A-A85F-831B574003F1}"/>
               </a:ext>
             </a:extLst>
           </p:cNvPr>
@@ -3995,7 +3995,7 @@
     </p:spTree>
     <p:extLst>
       <p:ext uri="{BB962C8B-B14F-4D97-AF65-F5344CB8AC3E}">
-        <p14:creationId xmlns:p14="http://schemas.microsoft.com/office/powerpoint/2010/main" val="1594212215"/>
+        <p14:creationId xmlns:p14="http://schemas.microsoft.com/office/powerpoint/2010/main" val="374340139"/>
       </p:ext>
     </p:extLst>
   </p:cSld>
@@ -4026,7 +4026,7 @@
           <p:cNvPr id="9" name="title-6">
             <a:extLst xmlns:a="http://schemas.openxmlformats.org/drawingml/2006/main">
               <a:ext uri="{FF2B5EF4-FFF2-40B4-BE49-F238E27FC236}">
-                <a16:creationId xmlns:a16="http://schemas.microsoft.com/office/drawing/2014/main" id="{ABB303DB-4442-4830-91B6-D2A6CFCD4071}"/>
+                <a16:creationId xmlns:a16="http://schemas.microsoft.com/office/drawing/2014/main" id="{0F50E3F6-87CE-4906-9389-DB3E142B60F9}"/>
               </a:ext>
             </a:extLst>
           </p:cNvPr>
@@ -4084,7 +4084,7 @@
           <p:cNvPr id="2" name="number-6">
             <a:extLst xmlns:a="http://schemas.openxmlformats.org/drawingml/2006/main">
               <a:ext uri="{FF2B5EF4-FFF2-40B4-BE49-F238E27FC236}">
-                <a16:creationId xmlns:a16="http://schemas.microsoft.com/office/drawing/2014/main" id="{774F36CD-53D3-47BD-A6EC-8BE747D8A098}"/>
+                <a16:creationId xmlns:a16="http://schemas.microsoft.com/office/drawing/2014/main" id="{DC3D0E24-C7AE-459B-AE9B-D889F27E1C2A}"/>
               </a:ext>
             </a:extLst>
           </p:cNvPr>
@@ -4142,7 +4142,7 @@
           <p:cNvPr id="3" name="step-num-0">
             <a:extLst xmlns:a="http://schemas.openxmlformats.org/drawingml/2006/main">
               <a:ext uri="{FF2B5EF4-FFF2-40B4-BE49-F238E27FC236}">
-                <a16:creationId xmlns:a16="http://schemas.microsoft.com/office/drawing/2014/main" id="{40F0F5CD-AC50-4705-B4E4-34E4D9CC9622}"/>
+                <a16:creationId xmlns:a16="http://schemas.microsoft.com/office/drawing/2014/main" id="{F858272E-4039-42AA-8F24-F30C048EB9F5}"/>
               </a:ext>
             </a:extLst>
           </p:cNvPr>
@@ -4202,7 +4202,7 @@
           <p:cNvPr id="4" name="step-0">
             <a:extLst xmlns:a="http://schemas.openxmlformats.org/drawingml/2006/main">
               <a:ext uri="{FF2B5EF4-FFF2-40B4-BE49-F238E27FC236}">
-                <a16:creationId xmlns:a16="http://schemas.microsoft.com/office/drawing/2014/main" id="{53282B88-2F16-422B-ACB9-766A456679A9}"/>
+                <a16:creationId xmlns:a16="http://schemas.microsoft.com/office/drawing/2014/main" id="{08F3C2BE-2E5E-4E67-BE92-801B7BC85701}"/>
               </a:ext>
             </a:extLst>
           </p:cNvPr>
@@ -4260,7 +4260,7 @@
           <p:cNvPr id="5" name="step-num-1">
             <a:extLst xmlns:a="http://schemas.openxmlformats.org/drawingml/2006/main">
               <a:ext uri="{FF2B5EF4-FFF2-40B4-BE49-F238E27FC236}">
-                <a16:creationId xmlns:a16="http://schemas.microsoft.com/office/drawing/2014/main" id="{8FDAFC85-29CE-44E9-8746-88B91C415BCC}"/>
+                <a16:creationId xmlns:a16="http://schemas.microsoft.com/office/drawing/2014/main" id="{A6CF575F-6909-4182-9E03-458D23656913}"/>
               </a:ext>
             </a:extLst>
           </p:cNvPr>
@@ -4320,7 +4320,7 @@
           <p:cNvPr id="6" name="step-1">
             <a:extLst xmlns:a="http://schemas.openxmlformats.org/drawingml/2006/main">
               <a:ext uri="{FF2B5EF4-FFF2-40B4-BE49-F238E27FC236}">
-                <a16:creationId xmlns:a16="http://schemas.microsoft.com/office/drawing/2014/main" id="{2F0C0FAF-AD72-4D28-89D5-224221C7639E}"/>
+                <a16:creationId xmlns:a16="http://schemas.microsoft.com/office/drawing/2014/main" id="{5DF2E34C-EFEC-4826-AA06-1DAF21B4170E}"/>
               </a:ext>
             </a:extLst>
           </p:cNvPr>
@@ -4378,7 +4378,7 @@
           <p:cNvPr id="7" name="step-num-2">
             <a:extLst xmlns:a="http://schemas.openxmlformats.org/drawingml/2006/main">
               <a:ext uri="{FF2B5EF4-FFF2-40B4-BE49-F238E27FC236}">
-                <a16:creationId xmlns:a16="http://schemas.microsoft.com/office/drawing/2014/main" id="{02276F05-23CF-424C-AE11-7C51405DA4D5}"/>
+                <a16:creationId xmlns:a16="http://schemas.microsoft.com/office/drawing/2014/main" id="{37D7572C-250F-4BC2-A7E2-1B83FEC55090}"/>
               </a:ext>
             </a:extLst>
           </p:cNvPr>
@@ -4438,7 +4438,7 @@
           <p:cNvPr id="8" name="step-2">
             <a:extLst xmlns:a="http://schemas.openxmlformats.org/drawingml/2006/main">
               <a:ext uri="{FF2B5EF4-FFF2-40B4-BE49-F238E27FC236}">
-                <a16:creationId xmlns:a16="http://schemas.microsoft.com/office/drawing/2014/main" id="{C3FADEFE-76F0-43A2-AC70-5191AC08B7D6}"/>
+                <a16:creationId xmlns:a16="http://schemas.microsoft.com/office/drawing/2014/main" id="{7B4A8868-C4F1-4CF2-BA47-0A2267C3C3B7}"/>
               </a:ext>
             </a:extLst>
           </p:cNvPr>
@@ -4494,7 +4494,7 @@
     </p:spTree>
     <p:extLst>
       <p:ext uri="{BB962C8B-B14F-4D97-AF65-F5344CB8AC3E}">
-        <p14:creationId xmlns:p14="http://schemas.microsoft.com/office/powerpoint/2010/main" val="1544792779"/>
+        <p14:creationId xmlns:p14="http://schemas.microsoft.com/office/powerpoint/2010/main" val="586171051"/>
       </p:ext>
     </p:extLst>
   </p:cSld>
